--- a/_maintain/slides_data-viz-basics_graphics.pptx
+++ b/_maintain/slides_data-viz-basics_graphics.pptx
@@ -5,12 +5,17 @@
     <p:sldMasterId id="2147483648" r:id="rId1"/>
   </p:sldMasterIdLst>
   <p:notesMasterIdLst>
-    <p:notesMasterId r:id="rId5"/>
+    <p:notesMasterId r:id="rId10"/>
   </p:notesMasterIdLst>
   <p:sldIdLst>
     <p:sldId id="318" r:id="rId2"/>
     <p:sldId id="319" r:id="rId3"/>
     <p:sldId id="320" r:id="rId4"/>
+    <p:sldId id="321" r:id="rId5"/>
+    <p:sldId id="322" r:id="rId6"/>
+    <p:sldId id="323" r:id="rId7"/>
+    <p:sldId id="324" r:id="rId8"/>
+    <p:sldId id="325" r:id="rId9"/>
   </p:sldIdLst>
   <p:sldSz cx="12192000" cy="6858000"/>
   <p:notesSz cx="6858000" cy="9144000"/>
@@ -6122,6 +6127,5536 @@
     <p:extLst>
       <p:ext uri="{BB962C8B-B14F-4D97-AF65-F5344CB8AC3E}">
         <p14:creationId xmlns:p14="http://schemas.microsoft.com/office/powerpoint/2010/main" val="116586477"/>
+      </p:ext>
+    </p:extLst>
+  </p:cSld>
+  <p:clrMapOvr>
+    <a:masterClrMapping/>
+  </p:clrMapOvr>
+</p:sld>
+</file>
+
+<file path=ppt/slides/slide4.xml><?xml version="1.0" encoding="utf-8"?>
+<p:sld xmlns:a="http://schemas.openxmlformats.org/drawingml/2006/main" xmlns:r="http://schemas.openxmlformats.org/officeDocument/2006/relationships" xmlns:p="http://schemas.openxmlformats.org/presentationml/2006/main">
+  <p:cSld>
+    <p:spTree>
+      <p:nvGrpSpPr>
+        <p:cNvPr id="1" name="">
+          <a:extLst>
+            <a:ext uri="{FF2B5EF4-FFF2-40B4-BE49-F238E27FC236}">
+              <a16:creationId xmlns:a16="http://schemas.microsoft.com/office/drawing/2014/main" id="{9B396AF2-E705-3811-2514-C279A302CB60}"/>
+            </a:ext>
+          </a:extLst>
+        </p:cNvPr>
+        <p:cNvGrpSpPr/>
+        <p:nvPr/>
+      </p:nvGrpSpPr>
+      <p:grpSpPr>
+        <a:xfrm>
+          <a:off x="0" y="0"/>
+          <a:ext cx="0" cy="0"/>
+          <a:chOff x="0" y="0"/>
+          <a:chExt cx="0" cy="0"/>
+        </a:xfrm>
+      </p:grpSpPr>
+      <p:sp>
+        <p:nvSpPr>
+          <p:cNvPr id="3" name="Title 1">
+            <a:extLst>
+              <a:ext uri="{FF2B5EF4-FFF2-40B4-BE49-F238E27FC236}">
+                <a16:creationId xmlns:a16="http://schemas.microsoft.com/office/drawing/2014/main" id="{C13DB992-6E0E-21FB-7550-B0A15CE9D2FB}"/>
+              </a:ext>
+            </a:extLst>
+          </p:cNvPr>
+          <p:cNvSpPr txBox="1">
+            <a:spLocks/>
+          </p:cNvSpPr>
+          <p:nvPr/>
+        </p:nvSpPr>
+        <p:spPr>
+          <a:xfrm>
+            <a:off x="0" y="0"/>
+            <a:ext cx="3323063" cy="373232"/>
+          </a:xfrm>
+          <a:prstGeom prst="rect">
+            <a:avLst/>
+          </a:prstGeom>
+          <a:solidFill>
+            <a:srgbClr val="725EEC"/>
+          </a:solidFill>
+        </p:spPr>
+        <p:txBody>
+          <a:bodyPr vert="horz" lIns="91440" tIns="45720" rIns="91440" bIns="45720" rtlCol="0" anchor="ctr">
+            <a:noAutofit/>
+          </a:bodyPr>
+          <a:lstStyle>
+            <a:lvl1pPr algn="ctr" defTabSz="914400" rtl="0" eaLnBrk="1" latinLnBrk="0" hangingPunct="1">
+              <a:lnSpc>
+                <a:spcPct val="90000"/>
+              </a:lnSpc>
+              <a:spcBef>
+                <a:spcPct val="0"/>
+              </a:spcBef>
+              <a:buNone/>
+              <a:defRPr sz="6000" kern="1200">
+                <a:solidFill>
+                  <a:schemeClr val="tx1"/>
+                </a:solidFill>
+                <a:latin typeface="+mj-lt"/>
+                <a:ea typeface="+mj-ea"/>
+                <a:cs typeface="+mj-cs"/>
+              </a:defRPr>
+            </a:lvl1pPr>
+          </a:lstStyle>
+          <a:p>
+            <a:pPr algn="l"/>
+            <a:r>
+              <a:rPr lang="en-US" sz="1800" dirty="0">
+                <a:solidFill>
+                  <a:schemeClr val="bg1"/>
+                </a:solidFill>
+                <a:latin typeface="+mn-lt"/>
+                <a:cs typeface="Arial" panose="020B0604020202020204" pitchFamily="34" charset="0"/>
+              </a:rPr>
+              <a:t>viz-roadmap-01.png</a:t>
+            </a:r>
+          </a:p>
+        </p:txBody>
+      </p:sp>
+      <p:sp>
+        <p:nvSpPr>
+          <p:cNvPr id="14" name="Rounded Rectangle 13">
+            <a:extLst>
+              <a:ext uri="{FF2B5EF4-FFF2-40B4-BE49-F238E27FC236}">
+                <a16:creationId xmlns:a16="http://schemas.microsoft.com/office/drawing/2014/main" id="{9F67F9C5-A6FC-DEB4-5F95-F2A0F7D7E615}"/>
+              </a:ext>
+            </a:extLst>
+          </p:cNvPr>
+          <p:cNvSpPr/>
+          <p:nvPr/>
+        </p:nvSpPr>
+        <p:spPr>
+          <a:xfrm>
+            <a:off x="3781573" y="1336962"/>
+            <a:ext cx="4441816" cy="467591"/>
+          </a:xfrm>
+          <a:prstGeom prst="roundRect">
+            <a:avLst/>
+          </a:prstGeom>
+          <a:solidFill>
+            <a:srgbClr val="FF6018"/>
+          </a:solidFill>
+          <a:ln>
+            <a:solidFill>
+              <a:srgbClr val="222222"/>
+            </a:solidFill>
+          </a:ln>
+        </p:spPr>
+        <p:style>
+          <a:lnRef idx="2">
+            <a:schemeClr val="accent1">
+              <a:shade val="15000"/>
+            </a:schemeClr>
+          </a:lnRef>
+          <a:fillRef idx="1">
+            <a:schemeClr val="accent1"/>
+          </a:fillRef>
+          <a:effectRef idx="0">
+            <a:schemeClr val="accent1"/>
+          </a:effectRef>
+          <a:fontRef idx="minor">
+            <a:schemeClr val="lt1"/>
+          </a:fontRef>
+        </p:style>
+        <p:txBody>
+          <a:bodyPr rtlCol="0" anchor="ctr"/>
+          <a:lstStyle/>
+          <a:p>
+            <a:pPr algn="ctr"/>
+            <a:r>
+              <a:rPr lang="en-US" b="1" dirty="0">
+                <a:solidFill>
+                  <a:srgbClr val="222222"/>
+                </a:solidFill>
+              </a:rPr>
+              <a:t>Is my </a:t>
+            </a:r>
+            <a:r>
+              <a:rPr lang="en-US" b="1" u="sng" dirty="0">
+                <a:solidFill>
+                  <a:srgbClr val="222222"/>
+                </a:solidFill>
+              </a:rPr>
+              <a:t>explanatory</a:t>
+            </a:r>
+            <a:r>
+              <a:rPr lang="en-US" b="1" dirty="0">
+                <a:solidFill>
+                  <a:srgbClr val="222222"/>
+                </a:solidFill>
+              </a:rPr>
+              <a:t> variable categorical?</a:t>
+            </a:r>
+          </a:p>
+        </p:txBody>
+      </p:sp>
+      <p:sp>
+        <p:nvSpPr>
+          <p:cNvPr id="15" name="Rounded Rectangle 14">
+            <a:extLst>
+              <a:ext uri="{FF2B5EF4-FFF2-40B4-BE49-F238E27FC236}">
+                <a16:creationId xmlns:a16="http://schemas.microsoft.com/office/drawing/2014/main" id="{7A768A05-C992-D6D8-827E-24AD1B6D82D4}"/>
+              </a:ext>
+            </a:extLst>
+          </p:cNvPr>
+          <p:cNvSpPr/>
+          <p:nvPr/>
+        </p:nvSpPr>
+        <p:spPr>
+          <a:xfrm>
+            <a:off x="1589120" y="2744636"/>
+            <a:ext cx="2784765" cy="756437"/>
+          </a:xfrm>
+          <a:prstGeom prst="roundRect">
+            <a:avLst/>
+          </a:prstGeom>
+          <a:solidFill>
+            <a:srgbClr val="FF6018"/>
+          </a:solidFill>
+          <a:ln>
+            <a:solidFill>
+              <a:srgbClr val="222222"/>
+            </a:solidFill>
+          </a:ln>
+        </p:spPr>
+        <p:style>
+          <a:lnRef idx="2">
+            <a:schemeClr val="accent1">
+              <a:shade val="15000"/>
+            </a:schemeClr>
+          </a:lnRef>
+          <a:fillRef idx="1">
+            <a:schemeClr val="accent1"/>
+          </a:fillRef>
+          <a:effectRef idx="0">
+            <a:schemeClr val="accent1"/>
+          </a:effectRef>
+          <a:fontRef idx="minor">
+            <a:schemeClr val="lt1"/>
+          </a:fontRef>
+        </p:style>
+        <p:txBody>
+          <a:bodyPr rtlCol="0" anchor="ctr"/>
+          <a:lstStyle/>
+          <a:p>
+            <a:pPr algn="ctr"/>
+            <a:r>
+              <a:rPr lang="en-US" b="1" dirty="0">
+                <a:solidFill>
+                  <a:srgbClr val="FF6018"/>
+                </a:solidFill>
+              </a:rPr>
+              <a:t>Is the </a:t>
+            </a:r>
+            <a:r>
+              <a:rPr lang="en-US" b="1" u="sng" dirty="0">
+                <a:solidFill>
+                  <a:srgbClr val="FF6018"/>
+                </a:solidFill>
+              </a:rPr>
+              <a:t>range</a:t>
+            </a:r>
+            <a:r>
+              <a:rPr lang="en-US" b="1" dirty="0">
+                <a:solidFill>
+                  <a:srgbClr val="FF6018"/>
+                </a:solidFill>
+              </a:rPr>
+              <a:t> of the data what’s important?</a:t>
+            </a:r>
+          </a:p>
+        </p:txBody>
+      </p:sp>
+      <p:sp>
+        <p:nvSpPr>
+          <p:cNvPr id="16" name="Rounded Rectangle 15">
+            <a:extLst>
+              <a:ext uri="{FF2B5EF4-FFF2-40B4-BE49-F238E27FC236}">
+                <a16:creationId xmlns:a16="http://schemas.microsoft.com/office/drawing/2014/main" id="{7EEDABB9-D899-E146-E85C-7C46F81824AF}"/>
+              </a:ext>
+            </a:extLst>
+          </p:cNvPr>
+          <p:cNvSpPr/>
+          <p:nvPr/>
+        </p:nvSpPr>
+        <p:spPr>
+          <a:xfrm>
+            <a:off x="9979238" y="4832166"/>
+            <a:ext cx="1907264" cy="576574"/>
+          </a:xfrm>
+          <a:prstGeom prst="roundRect">
+            <a:avLst/>
+          </a:prstGeom>
+          <a:solidFill>
+            <a:srgbClr val="725EEC"/>
+          </a:solidFill>
+          <a:ln>
+            <a:solidFill>
+              <a:srgbClr val="222222"/>
+            </a:solidFill>
+          </a:ln>
+        </p:spPr>
+        <p:style>
+          <a:lnRef idx="2">
+            <a:schemeClr val="accent1">
+              <a:shade val="15000"/>
+            </a:schemeClr>
+          </a:lnRef>
+          <a:fillRef idx="1">
+            <a:schemeClr val="accent1"/>
+          </a:fillRef>
+          <a:effectRef idx="0">
+            <a:schemeClr val="accent1"/>
+          </a:effectRef>
+          <a:fontRef idx="minor">
+            <a:schemeClr val="lt1"/>
+          </a:fontRef>
+        </p:style>
+        <p:txBody>
+          <a:bodyPr rtlCol="0" anchor="ctr"/>
+          <a:lstStyle/>
+          <a:p>
+            <a:pPr algn="ctr"/>
+            <a:r>
+              <a:rPr lang="en-US" sz="2800" b="1" dirty="0">
+                <a:solidFill>
+                  <a:srgbClr val="725EEC"/>
+                </a:solidFill>
+              </a:rPr>
+              <a:t>Scatterplot</a:t>
+            </a:r>
+          </a:p>
+        </p:txBody>
+      </p:sp>
+      <p:sp>
+        <p:nvSpPr>
+          <p:cNvPr id="17" name="Rounded Rectangle 16">
+            <a:extLst>
+              <a:ext uri="{FF2B5EF4-FFF2-40B4-BE49-F238E27FC236}">
+                <a16:creationId xmlns:a16="http://schemas.microsoft.com/office/drawing/2014/main" id="{D017FC37-B6D6-CCEF-2595-3386FC061C96}"/>
+              </a:ext>
+            </a:extLst>
+          </p:cNvPr>
+          <p:cNvSpPr/>
+          <p:nvPr/>
+        </p:nvSpPr>
+        <p:spPr>
+          <a:xfrm>
+            <a:off x="7194473" y="4832166"/>
+            <a:ext cx="1907264" cy="576574"/>
+          </a:xfrm>
+          <a:prstGeom prst="roundRect">
+            <a:avLst/>
+          </a:prstGeom>
+          <a:solidFill>
+            <a:srgbClr val="725EEC"/>
+          </a:solidFill>
+          <a:ln>
+            <a:solidFill>
+              <a:srgbClr val="222222"/>
+            </a:solidFill>
+          </a:ln>
+        </p:spPr>
+        <p:style>
+          <a:lnRef idx="2">
+            <a:schemeClr val="accent1">
+              <a:shade val="15000"/>
+            </a:schemeClr>
+          </a:lnRef>
+          <a:fillRef idx="1">
+            <a:schemeClr val="accent1"/>
+          </a:fillRef>
+          <a:effectRef idx="0">
+            <a:schemeClr val="accent1"/>
+          </a:effectRef>
+          <a:fontRef idx="minor">
+            <a:schemeClr val="lt1"/>
+          </a:fontRef>
+        </p:style>
+        <p:txBody>
+          <a:bodyPr rtlCol="0" anchor="ctr"/>
+          <a:lstStyle/>
+          <a:p>
+            <a:pPr algn="ctr"/>
+            <a:r>
+              <a:rPr lang="en-US" sz="2000" b="1" dirty="0">
+                <a:solidFill>
+                  <a:srgbClr val="725EEC"/>
+                </a:solidFill>
+              </a:rPr>
+              <a:t>Scatterplot + ”Best Fit” Line</a:t>
+            </a:r>
+          </a:p>
+        </p:txBody>
+      </p:sp>
+      <p:cxnSp>
+        <p:nvCxnSpPr>
+          <p:cNvPr id="20" name="Curved Connector 19">
+            <a:extLst>
+              <a:ext uri="{FF2B5EF4-FFF2-40B4-BE49-F238E27FC236}">
+                <a16:creationId xmlns:a16="http://schemas.microsoft.com/office/drawing/2014/main" id="{4797C679-7B56-6776-2B59-8E45F675506B}"/>
+              </a:ext>
+            </a:extLst>
+          </p:cNvPr>
+          <p:cNvCxnSpPr>
+            <a:cxnSpLocks/>
+            <a:stCxn id="14" idx="2"/>
+            <a:endCxn id="24" idx="0"/>
+          </p:cNvCxnSpPr>
+          <p:nvPr/>
+        </p:nvCxnSpPr>
+        <p:spPr>
+          <a:xfrm rot="16200000" flipH="1">
+            <a:off x="7236983" y="570050"/>
+            <a:ext cx="1069003" cy="3538007"/>
+          </a:xfrm>
+          <a:prstGeom prst="curvedConnector3">
+            <a:avLst>
+              <a:gd name="adj1" fmla="val 50000"/>
+            </a:avLst>
+          </a:prstGeom>
+          <a:ln w="38100">
+            <a:solidFill>
+              <a:srgbClr val="FFB02F"/>
+            </a:solidFill>
+            <a:tailEnd type="triangle"/>
+          </a:ln>
+        </p:spPr>
+        <p:style>
+          <a:lnRef idx="1">
+            <a:schemeClr val="accent1"/>
+          </a:lnRef>
+          <a:fillRef idx="0">
+            <a:schemeClr val="accent1"/>
+          </a:fillRef>
+          <a:effectRef idx="0">
+            <a:schemeClr val="accent1"/>
+          </a:effectRef>
+          <a:fontRef idx="minor">
+            <a:schemeClr val="tx1"/>
+          </a:fontRef>
+        </p:style>
+      </p:cxnSp>
+      <p:cxnSp>
+        <p:nvCxnSpPr>
+          <p:cNvPr id="23" name="Curved Connector 22">
+            <a:extLst>
+              <a:ext uri="{FF2B5EF4-FFF2-40B4-BE49-F238E27FC236}">
+                <a16:creationId xmlns:a16="http://schemas.microsoft.com/office/drawing/2014/main" id="{D8F6B5E9-8F31-8C57-22E3-C1074161BAB3}"/>
+              </a:ext>
+            </a:extLst>
+          </p:cNvPr>
+          <p:cNvCxnSpPr>
+            <a:cxnSpLocks/>
+            <a:stCxn id="14" idx="2"/>
+            <a:endCxn id="15" idx="0"/>
+          </p:cNvCxnSpPr>
+          <p:nvPr/>
+        </p:nvCxnSpPr>
+        <p:spPr>
+          <a:xfrm rot="5400000">
+            <a:off x="4021951" y="764105"/>
+            <a:ext cx="940083" cy="3020978"/>
+          </a:xfrm>
+          <a:prstGeom prst="curvedConnector3">
+            <a:avLst/>
+          </a:prstGeom>
+          <a:ln w="38100">
+            <a:solidFill>
+              <a:srgbClr val="DF227C"/>
+            </a:solidFill>
+            <a:tailEnd type="triangle"/>
+          </a:ln>
+        </p:spPr>
+        <p:style>
+          <a:lnRef idx="1">
+            <a:schemeClr val="accent1"/>
+          </a:lnRef>
+          <a:fillRef idx="0">
+            <a:schemeClr val="accent1"/>
+          </a:fillRef>
+          <a:effectRef idx="0">
+            <a:schemeClr val="accent1"/>
+          </a:effectRef>
+          <a:fontRef idx="minor">
+            <a:schemeClr val="tx1"/>
+          </a:fontRef>
+        </p:style>
+      </p:cxnSp>
+      <p:sp>
+        <p:nvSpPr>
+          <p:cNvPr id="24" name="Rounded Rectangle 23">
+            <a:extLst>
+              <a:ext uri="{FF2B5EF4-FFF2-40B4-BE49-F238E27FC236}">
+                <a16:creationId xmlns:a16="http://schemas.microsoft.com/office/drawing/2014/main" id="{40004FB2-46A4-83AD-B7DC-6A7255DDDB9C}"/>
+              </a:ext>
+            </a:extLst>
+          </p:cNvPr>
+          <p:cNvSpPr/>
+          <p:nvPr/>
+        </p:nvSpPr>
+        <p:spPr>
+          <a:xfrm>
+            <a:off x="8148105" y="2873556"/>
+            <a:ext cx="2784765" cy="498596"/>
+          </a:xfrm>
+          <a:prstGeom prst="roundRect">
+            <a:avLst/>
+          </a:prstGeom>
+          <a:solidFill>
+            <a:srgbClr val="FF6018"/>
+          </a:solidFill>
+          <a:ln>
+            <a:solidFill>
+              <a:srgbClr val="222222"/>
+            </a:solidFill>
+          </a:ln>
+        </p:spPr>
+        <p:style>
+          <a:lnRef idx="2">
+            <a:schemeClr val="accent1">
+              <a:shade val="15000"/>
+            </a:schemeClr>
+          </a:lnRef>
+          <a:fillRef idx="1">
+            <a:schemeClr val="accent1"/>
+          </a:fillRef>
+          <a:effectRef idx="0">
+            <a:schemeClr val="accent1"/>
+          </a:effectRef>
+          <a:fontRef idx="minor">
+            <a:schemeClr val="lt1"/>
+          </a:fontRef>
+        </p:style>
+        <p:txBody>
+          <a:bodyPr rtlCol="0" anchor="ctr"/>
+          <a:lstStyle/>
+          <a:p>
+            <a:pPr algn="ctr"/>
+            <a:r>
+              <a:rPr lang="en-US" b="1" dirty="0">
+                <a:solidFill>
+                  <a:srgbClr val="FF6018"/>
+                </a:solidFill>
+              </a:rPr>
+              <a:t>Do I care about the </a:t>
+            </a:r>
+            <a:r>
+              <a:rPr lang="en-US" b="1" u="sng" dirty="0">
+                <a:solidFill>
+                  <a:srgbClr val="FF6018"/>
+                </a:solidFill>
+              </a:rPr>
+              <a:t>trend</a:t>
+            </a:r>
+            <a:r>
+              <a:rPr lang="en-US" b="1" dirty="0">
+                <a:solidFill>
+                  <a:srgbClr val="FF6018"/>
+                </a:solidFill>
+              </a:rPr>
+              <a:t>?</a:t>
+            </a:r>
+          </a:p>
+        </p:txBody>
+      </p:sp>
+      <p:cxnSp>
+        <p:nvCxnSpPr>
+          <p:cNvPr id="25" name="Curved Connector 24">
+            <a:extLst>
+              <a:ext uri="{FF2B5EF4-FFF2-40B4-BE49-F238E27FC236}">
+                <a16:creationId xmlns:a16="http://schemas.microsoft.com/office/drawing/2014/main" id="{4F997C51-A7ED-9798-A1B1-84EF4A206470}"/>
+              </a:ext>
+            </a:extLst>
+          </p:cNvPr>
+          <p:cNvCxnSpPr>
+            <a:cxnSpLocks/>
+            <a:stCxn id="24" idx="2"/>
+            <a:endCxn id="16" idx="0"/>
+          </p:cNvCxnSpPr>
+          <p:nvPr/>
+        </p:nvCxnSpPr>
+        <p:spPr>
+          <a:xfrm rot="16200000" flipH="1">
+            <a:off x="9506672" y="3405968"/>
+            <a:ext cx="1460014" cy="1392382"/>
+          </a:xfrm>
+          <a:prstGeom prst="curvedConnector3">
+            <a:avLst>
+              <a:gd name="adj1" fmla="val 50000"/>
+            </a:avLst>
+          </a:prstGeom>
+          <a:ln w="38100">
+            <a:solidFill>
+              <a:srgbClr val="FFB02F"/>
+            </a:solidFill>
+            <a:tailEnd type="triangle"/>
+          </a:ln>
+        </p:spPr>
+        <p:style>
+          <a:lnRef idx="1">
+            <a:schemeClr val="accent1"/>
+          </a:lnRef>
+          <a:fillRef idx="0">
+            <a:schemeClr val="accent1"/>
+          </a:fillRef>
+          <a:effectRef idx="0">
+            <a:schemeClr val="accent1"/>
+          </a:effectRef>
+          <a:fontRef idx="minor">
+            <a:schemeClr val="tx1"/>
+          </a:fontRef>
+        </p:style>
+      </p:cxnSp>
+      <p:cxnSp>
+        <p:nvCxnSpPr>
+          <p:cNvPr id="29" name="Curved Connector 28">
+            <a:extLst>
+              <a:ext uri="{FF2B5EF4-FFF2-40B4-BE49-F238E27FC236}">
+                <a16:creationId xmlns:a16="http://schemas.microsoft.com/office/drawing/2014/main" id="{B3C30B3C-6D67-7390-77A3-B7AEA120A416}"/>
+              </a:ext>
+            </a:extLst>
+          </p:cNvPr>
+          <p:cNvCxnSpPr>
+            <a:cxnSpLocks/>
+            <a:stCxn id="24" idx="2"/>
+            <a:endCxn id="17" idx="0"/>
+          </p:cNvCxnSpPr>
+          <p:nvPr/>
+        </p:nvCxnSpPr>
+        <p:spPr>
+          <a:xfrm rot="5400000">
+            <a:off x="8114290" y="3405968"/>
+            <a:ext cx="1460014" cy="1392383"/>
+          </a:xfrm>
+          <a:prstGeom prst="curvedConnector3">
+            <a:avLst>
+              <a:gd name="adj1" fmla="val 50000"/>
+            </a:avLst>
+          </a:prstGeom>
+          <a:ln w="38100">
+            <a:solidFill>
+              <a:srgbClr val="DF227C"/>
+            </a:solidFill>
+            <a:tailEnd type="triangle"/>
+          </a:ln>
+        </p:spPr>
+        <p:style>
+          <a:lnRef idx="1">
+            <a:schemeClr val="accent1"/>
+          </a:lnRef>
+          <a:fillRef idx="0">
+            <a:schemeClr val="accent1"/>
+          </a:fillRef>
+          <a:effectRef idx="0">
+            <a:schemeClr val="accent1"/>
+          </a:effectRef>
+          <a:fontRef idx="minor">
+            <a:schemeClr val="tx1"/>
+          </a:fontRef>
+        </p:style>
+      </p:cxnSp>
+      <p:sp>
+        <p:nvSpPr>
+          <p:cNvPr id="40" name="TextBox 39">
+            <a:extLst>
+              <a:ext uri="{FF2B5EF4-FFF2-40B4-BE49-F238E27FC236}">
+                <a16:creationId xmlns:a16="http://schemas.microsoft.com/office/drawing/2014/main" id="{3C72B49F-A71D-ED92-93FF-26C12D83E12B}"/>
+              </a:ext>
+            </a:extLst>
+          </p:cNvPr>
+          <p:cNvSpPr txBox="1"/>
+          <p:nvPr/>
+        </p:nvSpPr>
+        <p:spPr>
+          <a:xfrm>
+            <a:off x="7459681" y="1980880"/>
+            <a:ext cx="460382" cy="369332"/>
+          </a:xfrm>
+          <a:prstGeom prst="rect">
+            <a:avLst/>
+          </a:prstGeom>
+          <a:noFill/>
+        </p:spPr>
+        <p:txBody>
+          <a:bodyPr wrap="none" rtlCol="0">
+            <a:spAutoFit/>
+          </a:bodyPr>
+          <a:lstStyle/>
+          <a:p>
+            <a:r>
+              <a:rPr lang="en-US" b="1" dirty="0">
+                <a:solidFill>
+                  <a:srgbClr val="FFB02F"/>
+                </a:solidFill>
+              </a:rPr>
+              <a:t>No</a:t>
+            </a:r>
+          </a:p>
+        </p:txBody>
+      </p:sp>
+      <p:sp>
+        <p:nvSpPr>
+          <p:cNvPr id="41" name="TextBox 40">
+            <a:extLst>
+              <a:ext uri="{FF2B5EF4-FFF2-40B4-BE49-F238E27FC236}">
+                <a16:creationId xmlns:a16="http://schemas.microsoft.com/office/drawing/2014/main" id="{97DC3DEC-892B-06A5-A568-A1C5DA41E5CB}"/>
+              </a:ext>
+            </a:extLst>
+          </p:cNvPr>
+          <p:cNvSpPr txBox="1"/>
+          <p:nvPr/>
+        </p:nvSpPr>
+        <p:spPr>
+          <a:xfrm>
+            <a:off x="10236679" y="3686082"/>
+            <a:ext cx="460382" cy="369332"/>
+          </a:xfrm>
+          <a:prstGeom prst="rect">
+            <a:avLst/>
+          </a:prstGeom>
+          <a:noFill/>
+        </p:spPr>
+        <p:txBody>
+          <a:bodyPr wrap="none" rtlCol="0">
+            <a:spAutoFit/>
+          </a:bodyPr>
+          <a:lstStyle/>
+          <a:p>
+            <a:r>
+              <a:rPr lang="en-US" b="1" dirty="0">
+                <a:solidFill>
+                  <a:srgbClr val="FFB02F"/>
+                </a:solidFill>
+              </a:rPr>
+              <a:t>No</a:t>
+            </a:r>
+          </a:p>
+        </p:txBody>
+      </p:sp>
+      <p:sp>
+        <p:nvSpPr>
+          <p:cNvPr id="42" name="TextBox 41">
+            <a:extLst>
+              <a:ext uri="{FF2B5EF4-FFF2-40B4-BE49-F238E27FC236}">
+                <a16:creationId xmlns:a16="http://schemas.microsoft.com/office/drawing/2014/main" id="{D29A08E7-BE3C-DB91-26AE-2B9639F1F8FF}"/>
+              </a:ext>
+            </a:extLst>
+          </p:cNvPr>
+          <p:cNvSpPr txBox="1"/>
+          <p:nvPr/>
+        </p:nvSpPr>
+        <p:spPr>
+          <a:xfrm>
+            <a:off x="8452575" y="3686082"/>
+            <a:ext cx="493212" cy="369332"/>
+          </a:xfrm>
+          <a:prstGeom prst="rect">
+            <a:avLst/>
+          </a:prstGeom>
+          <a:noFill/>
+        </p:spPr>
+        <p:txBody>
+          <a:bodyPr wrap="none" rtlCol="0">
+            <a:spAutoFit/>
+          </a:bodyPr>
+          <a:lstStyle/>
+          <a:p>
+            <a:r>
+              <a:rPr lang="en-US" b="1" dirty="0">
+                <a:solidFill>
+                  <a:srgbClr val="DF227C"/>
+                </a:solidFill>
+              </a:rPr>
+              <a:t>Yes</a:t>
+            </a:r>
+          </a:p>
+        </p:txBody>
+      </p:sp>
+      <p:sp>
+        <p:nvSpPr>
+          <p:cNvPr id="47" name="TextBox 46">
+            <a:extLst>
+              <a:ext uri="{FF2B5EF4-FFF2-40B4-BE49-F238E27FC236}">
+                <a16:creationId xmlns:a16="http://schemas.microsoft.com/office/drawing/2014/main" id="{17F8B37D-5F69-EC57-105B-89B50B7728DE}"/>
+              </a:ext>
+            </a:extLst>
+          </p:cNvPr>
+          <p:cNvSpPr txBox="1"/>
+          <p:nvPr/>
+        </p:nvSpPr>
+        <p:spPr>
+          <a:xfrm>
+            <a:off x="4298675" y="1935529"/>
+            <a:ext cx="493212" cy="369332"/>
+          </a:xfrm>
+          <a:prstGeom prst="rect">
+            <a:avLst/>
+          </a:prstGeom>
+          <a:noFill/>
+        </p:spPr>
+        <p:txBody>
+          <a:bodyPr wrap="none" rtlCol="0">
+            <a:spAutoFit/>
+          </a:bodyPr>
+          <a:lstStyle/>
+          <a:p>
+            <a:r>
+              <a:rPr lang="en-US" b="1" dirty="0">
+                <a:solidFill>
+                  <a:srgbClr val="DF227C"/>
+                </a:solidFill>
+              </a:rPr>
+              <a:t>Yes</a:t>
+            </a:r>
+          </a:p>
+        </p:txBody>
+      </p:sp>
+      <p:cxnSp>
+        <p:nvCxnSpPr>
+          <p:cNvPr id="61" name="Curved Connector 60">
+            <a:extLst>
+              <a:ext uri="{FF2B5EF4-FFF2-40B4-BE49-F238E27FC236}">
+                <a16:creationId xmlns:a16="http://schemas.microsoft.com/office/drawing/2014/main" id="{1F59A1FF-4043-ADF3-0AF7-42CC13B01815}"/>
+              </a:ext>
+            </a:extLst>
+          </p:cNvPr>
+          <p:cNvCxnSpPr>
+            <a:cxnSpLocks/>
+            <a:stCxn id="15" idx="2"/>
+            <a:endCxn id="67" idx="0"/>
+          </p:cNvCxnSpPr>
+          <p:nvPr/>
+        </p:nvCxnSpPr>
+        <p:spPr>
+          <a:xfrm rot="16200000" flipH="1">
+            <a:off x="3012148" y="3470428"/>
+            <a:ext cx="1331093" cy="1392382"/>
+          </a:xfrm>
+          <a:prstGeom prst="curvedConnector3">
+            <a:avLst>
+              <a:gd name="adj1" fmla="val 50000"/>
+            </a:avLst>
+          </a:prstGeom>
+          <a:ln w="38100">
+            <a:solidFill>
+              <a:srgbClr val="FFB02F"/>
+            </a:solidFill>
+            <a:tailEnd type="triangle"/>
+          </a:ln>
+        </p:spPr>
+        <p:style>
+          <a:lnRef idx="1">
+            <a:schemeClr val="accent1"/>
+          </a:lnRef>
+          <a:fillRef idx="0">
+            <a:schemeClr val="accent1"/>
+          </a:fillRef>
+          <a:effectRef idx="0">
+            <a:schemeClr val="accent1"/>
+          </a:effectRef>
+          <a:fontRef idx="minor">
+            <a:schemeClr val="tx1"/>
+          </a:fontRef>
+        </p:style>
+      </p:cxnSp>
+      <p:cxnSp>
+        <p:nvCxnSpPr>
+          <p:cNvPr id="62" name="Curved Connector 61">
+            <a:extLst>
+              <a:ext uri="{FF2B5EF4-FFF2-40B4-BE49-F238E27FC236}">
+                <a16:creationId xmlns:a16="http://schemas.microsoft.com/office/drawing/2014/main" id="{6D7240B3-11F8-6543-E51F-10A2786CAD14}"/>
+              </a:ext>
+            </a:extLst>
+          </p:cNvPr>
+          <p:cNvCxnSpPr>
+            <a:cxnSpLocks/>
+            <a:stCxn id="15" idx="2"/>
+            <a:endCxn id="68" idx="0"/>
+          </p:cNvCxnSpPr>
+          <p:nvPr/>
+        </p:nvCxnSpPr>
+        <p:spPr>
+          <a:xfrm rot="5400000">
+            <a:off x="1619766" y="3470428"/>
+            <a:ext cx="1331093" cy="1392383"/>
+          </a:xfrm>
+          <a:prstGeom prst="curvedConnector3">
+            <a:avLst>
+              <a:gd name="adj1" fmla="val 50000"/>
+            </a:avLst>
+          </a:prstGeom>
+          <a:ln w="38100">
+            <a:solidFill>
+              <a:srgbClr val="DF227C"/>
+            </a:solidFill>
+            <a:tailEnd type="triangle"/>
+          </a:ln>
+        </p:spPr>
+        <p:style>
+          <a:lnRef idx="1">
+            <a:schemeClr val="accent1"/>
+          </a:lnRef>
+          <a:fillRef idx="0">
+            <a:schemeClr val="accent1"/>
+          </a:fillRef>
+          <a:effectRef idx="0">
+            <a:schemeClr val="accent1"/>
+          </a:effectRef>
+          <a:fontRef idx="minor">
+            <a:schemeClr val="tx1"/>
+          </a:fontRef>
+        </p:style>
+      </p:cxnSp>
+      <p:sp>
+        <p:nvSpPr>
+          <p:cNvPr id="63" name="TextBox 62">
+            <a:extLst>
+              <a:ext uri="{FF2B5EF4-FFF2-40B4-BE49-F238E27FC236}">
+                <a16:creationId xmlns:a16="http://schemas.microsoft.com/office/drawing/2014/main" id="{A42090E9-05C7-B32E-3578-AE3659BD930E}"/>
+              </a:ext>
+            </a:extLst>
+          </p:cNvPr>
+          <p:cNvSpPr txBox="1"/>
+          <p:nvPr/>
+        </p:nvSpPr>
+        <p:spPr>
+          <a:xfrm>
+            <a:off x="3606044" y="3797287"/>
+            <a:ext cx="460382" cy="369332"/>
+          </a:xfrm>
+          <a:prstGeom prst="rect">
+            <a:avLst/>
+          </a:prstGeom>
+          <a:noFill/>
+        </p:spPr>
+        <p:txBody>
+          <a:bodyPr wrap="none" rtlCol="0">
+            <a:spAutoFit/>
+          </a:bodyPr>
+          <a:lstStyle/>
+          <a:p>
+            <a:r>
+              <a:rPr lang="en-US" b="1" dirty="0">
+                <a:solidFill>
+                  <a:srgbClr val="FFB02F"/>
+                </a:solidFill>
+              </a:rPr>
+              <a:t>No</a:t>
+            </a:r>
+          </a:p>
+        </p:txBody>
+      </p:sp>
+      <p:sp>
+        <p:nvSpPr>
+          <p:cNvPr id="64" name="TextBox 63">
+            <a:extLst>
+              <a:ext uri="{FF2B5EF4-FFF2-40B4-BE49-F238E27FC236}">
+                <a16:creationId xmlns:a16="http://schemas.microsoft.com/office/drawing/2014/main" id="{67A069E9-5C1D-2CF4-B8FA-2B56FE1F72D6}"/>
+              </a:ext>
+            </a:extLst>
+          </p:cNvPr>
+          <p:cNvSpPr txBox="1"/>
+          <p:nvPr/>
+        </p:nvSpPr>
+        <p:spPr>
+          <a:xfrm>
+            <a:off x="1932730" y="3797287"/>
+            <a:ext cx="493212" cy="369332"/>
+          </a:xfrm>
+          <a:prstGeom prst="rect">
+            <a:avLst/>
+          </a:prstGeom>
+          <a:noFill/>
+        </p:spPr>
+        <p:txBody>
+          <a:bodyPr wrap="none" rtlCol="0">
+            <a:spAutoFit/>
+          </a:bodyPr>
+          <a:lstStyle/>
+          <a:p>
+            <a:r>
+              <a:rPr lang="en-US" b="1" dirty="0">
+                <a:solidFill>
+                  <a:srgbClr val="DF227C"/>
+                </a:solidFill>
+              </a:rPr>
+              <a:t>Yes</a:t>
+            </a:r>
+          </a:p>
+        </p:txBody>
+      </p:sp>
+      <p:sp>
+        <p:nvSpPr>
+          <p:cNvPr id="67" name="Rounded Rectangle 66">
+            <a:extLst>
+              <a:ext uri="{FF2B5EF4-FFF2-40B4-BE49-F238E27FC236}">
+                <a16:creationId xmlns:a16="http://schemas.microsoft.com/office/drawing/2014/main" id="{2C1F748B-2063-5ADC-E0AC-9E1951983B80}"/>
+              </a:ext>
+            </a:extLst>
+          </p:cNvPr>
+          <p:cNvSpPr/>
+          <p:nvPr/>
+        </p:nvSpPr>
+        <p:spPr>
+          <a:xfrm>
+            <a:off x="3420253" y="4832166"/>
+            <a:ext cx="1907264" cy="576574"/>
+          </a:xfrm>
+          <a:prstGeom prst="roundRect">
+            <a:avLst/>
+          </a:prstGeom>
+          <a:solidFill>
+            <a:srgbClr val="725EEC"/>
+          </a:solidFill>
+          <a:ln>
+            <a:solidFill>
+              <a:srgbClr val="222222"/>
+            </a:solidFill>
+          </a:ln>
+        </p:spPr>
+        <p:style>
+          <a:lnRef idx="2">
+            <a:schemeClr val="accent1">
+              <a:shade val="15000"/>
+            </a:schemeClr>
+          </a:lnRef>
+          <a:fillRef idx="1">
+            <a:schemeClr val="accent1"/>
+          </a:fillRef>
+          <a:effectRef idx="0">
+            <a:schemeClr val="accent1"/>
+          </a:effectRef>
+          <a:fontRef idx="minor">
+            <a:schemeClr val="lt1"/>
+          </a:fontRef>
+        </p:style>
+        <p:txBody>
+          <a:bodyPr rtlCol="0" anchor="ctr"/>
+          <a:lstStyle/>
+          <a:p>
+            <a:pPr algn="ctr"/>
+            <a:r>
+              <a:rPr lang="en-US" sz="2800" b="1" dirty="0">
+                <a:solidFill>
+                  <a:srgbClr val="725EEC"/>
+                </a:solidFill>
+              </a:rPr>
+              <a:t>Bar Graph</a:t>
+            </a:r>
+          </a:p>
+        </p:txBody>
+      </p:sp>
+      <p:sp>
+        <p:nvSpPr>
+          <p:cNvPr id="68" name="Rounded Rectangle 67">
+            <a:extLst>
+              <a:ext uri="{FF2B5EF4-FFF2-40B4-BE49-F238E27FC236}">
+                <a16:creationId xmlns:a16="http://schemas.microsoft.com/office/drawing/2014/main" id="{4281211D-A13E-ACF6-B1B6-44C311A9AA4F}"/>
+              </a:ext>
+            </a:extLst>
+          </p:cNvPr>
+          <p:cNvSpPr/>
+          <p:nvPr/>
+        </p:nvSpPr>
+        <p:spPr>
+          <a:xfrm>
+            <a:off x="635488" y="4832166"/>
+            <a:ext cx="1907264" cy="576574"/>
+          </a:xfrm>
+          <a:prstGeom prst="roundRect">
+            <a:avLst/>
+          </a:prstGeom>
+          <a:solidFill>
+            <a:srgbClr val="725EEC"/>
+          </a:solidFill>
+          <a:ln>
+            <a:solidFill>
+              <a:srgbClr val="222222"/>
+            </a:solidFill>
+          </a:ln>
+        </p:spPr>
+        <p:style>
+          <a:lnRef idx="2">
+            <a:schemeClr val="accent1">
+              <a:shade val="15000"/>
+            </a:schemeClr>
+          </a:lnRef>
+          <a:fillRef idx="1">
+            <a:schemeClr val="accent1"/>
+          </a:fillRef>
+          <a:effectRef idx="0">
+            <a:schemeClr val="accent1"/>
+          </a:effectRef>
+          <a:fontRef idx="minor">
+            <a:schemeClr val="lt1"/>
+          </a:fontRef>
+        </p:style>
+        <p:txBody>
+          <a:bodyPr rtlCol="0" anchor="ctr"/>
+          <a:lstStyle/>
+          <a:p>
+            <a:pPr algn="ctr"/>
+            <a:r>
+              <a:rPr lang="en-US" sz="2000" b="1" dirty="0">
+                <a:solidFill>
+                  <a:srgbClr val="725EEC"/>
+                </a:solidFill>
+              </a:rPr>
+              <a:t>Boxplot / </a:t>
+            </a:r>
+          </a:p>
+          <a:p>
+            <a:pPr algn="ctr"/>
+            <a:r>
+              <a:rPr lang="en-US" sz="2000" b="1" dirty="0">
+                <a:solidFill>
+                  <a:srgbClr val="725EEC"/>
+                </a:solidFill>
+              </a:rPr>
+              <a:t>Violin Plot</a:t>
+            </a:r>
+          </a:p>
+        </p:txBody>
+      </p:sp>
+    </p:spTree>
+    <p:extLst>
+      <p:ext uri="{BB962C8B-B14F-4D97-AF65-F5344CB8AC3E}">
+        <p14:creationId xmlns:p14="http://schemas.microsoft.com/office/powerpoint/2010/main" val="2631861468"/>
+      </p:ext>
+    </p:extLst>
+  </p:cSld>
+  <p:clrMapOvr>
+    <a:masterClrMapping/>
+  </p:clrMapOvr>
+</p:sld>
+</file>
+
+<file path=ppt/slides/slide5.xml><?xml version="1.0" encoding="utf-8"?>
+<p:sld xmlns:a="http://schemas.openxmlformats.org/drawingml/2006/main" xmlns:r="http://schemas.openxmlformats.org/officeDocument/2006/relationships" xmlns:p="http://schemas.openxmlformats.org/presentationml/2006/main">
+  <p:cSld>
+    <p:spTree>
+      <p:nvGrpSpPr>
+        <p:cNvPr id="1" name="">
+          <a:extLst>
+            <a:ext uri="{FF2B5EF4-FFF2-40B4-BE49-F238E27FC236}">
+              <a16:creationId xmlns:a16="http://schemas.microsoft.com/office/drawing/2014/main" id="{BF27F1A4-843B-4E73-CAAF-D6A8B4D8DECD}"/>
+            </a:ext>
+          </a:extLst>
+        </p:cNvPr>
+        <p:cNvGrpSpPr/>
+        <p:nvPr/>
+      </p:nvGrpSpPr>
+      <p:grpSpPr>
+        <a:xfrm>
+          <a:off x="0" y="0"/>
+          <a:ext cx="0" cy="0"/>
+          <a:chOff x="0" y="0"/>
+          <a:chExt cx="0" cy="0"/>
+        </a:xfrm>
+      </p:grpSpPr>
+      <p:sp>
+        <p:nvSpPr>
+          <p:cNvPr id="3" name="Title 1">
+            <a:extLst>
+              <a:ext uri="{FF2B5EF4-FFF2-40B4-BE49-F238E27FC236}">
+                <a16:creationId xmlns:a16="http://schemas.microsoft.com/office/drawing/2014/main" id="{1E0E8C3A-D46E-1CC8-783A-6EF59DB4B554}"/>
+              </a:ext>
+            </a:extLst>
+          </p:cNvPr>
+          <p:cNvSpPr txBox="1">
+            <a:spLocks/>
+          </p:cNvSpPr>
+          <p:nvPr/>
+        </p:nvSpPr>
+        <p:spPr>
+          <a:xfrm>
+            <a:off x="0" y="0"/>
+            <a:ext cx="3323063" cy="373232"/>
+          </a:xfrm>
+          <a:prstGeom prst="rect">
+            <a:avLst/>
+          </a:prstGeom>
+          <a:solidFill>
+            <a:srgbClr val="725EEC"/>
+          </a:solidFill>
+        </p:spPr>
+        <p:txBody>
+          <a:bodyPr vert="horz" lIns="91440" tIns="45720" rIns="91440" bIns="45720" rtlCol="0" anchor="ctr">
+            <a:noAutofit/>
+          </a:bodyPr>
+          <a:lstStyle>
+            <a:lvl1pPr algn="ctr" defTabSz="914400" rtl="0" eaLnBrk="1" latinLnBrk="0" hangingPunct="1">
+              <a:lnSpc>
+                <a:spcPct val="90000"/>
+              </a:lnSpc>
+              <a:spcBef>
+                <a:spcPct val="0"/>
+              </a:spcBef>
+              <a:buNone/>
+              <a:defRPr sz="6000" kern="1200">
+                <a:solidFill>
+                  <a:schemeClr val="tx1"/>
+                </a:solidFill>
+                <a:latin typeface="+mj-lt"/>
+                <a:ea typeface="+mj-ea"/>
+                <a:cs typeface="+mj-cs"/>
+              </a:defRPr>
+            </a:lvl1pPr>
+          </a:lstStyle>
+          <a:p>
+            <a:pPr algn="l"/>
+            <a:r>
+              <a:rPr lang="en-US" sz="1800" dirty="0">
+                <a:solidFill>
+                  <a:schemeClr val="bg1"/>
+                </a:solidFill>
+                <a:latin typeface="+mn-lt"/>
+                <a:cs typeface="Arial" panose="020B0604020202020204" pitchFamily="34" charset="0"/>
+              </a:rPr>
+              <a:t>viz-roadmap-02.png</a:t>
+            </a:r>
+          </a:p>
+        </p:txBody>
+      </p:sp>
+      <p:sp>
+        <p:nvSpPr>
+          <p:cNvPr id="14" name="Rounded Rectangle 13">
+            <a:extLst>
+              <a:ext uri="{FF2B5EF4-FFF2-40B4-BE49-F238E27FC236}">
+                <a16:creationId xmlns:a16="http://schemas.microsoft.com/office/drawing/2014/main" id="{BD7824B0-933B-793D-86CF-AE96DB99C474}"/>
+              </a:ext>
+            </a:extLst>
+          </p:cNvPr>
+          <p:cNvSpPr/>
+          <p:nvPr/>
+        </p:nvSpPr>
+        <p:spPr>
+          <a:xfrm>
+            <a:off x="3781573" y="1336962"/>
+            <a:ext cx="4441816" cy="467591"/>
+          </a:xfrm>
+          <a:prstGeom prst="roundRect">
+            <a:avLst/>
+          </a:prstGeom>
+          <a:solidFill>
+            <a:srgbClr val="FF6018"/>
+          </a:solidFill>
+          <a:ln>
+            <a:solidFill>
+              <a:srgbClr val="222222"/>
+            </a:solidFill>
+          </a:ln>
+        </p:spPr>
+        <p:style>
+          <a:lnRef idx="2">
+            <a:schemeClr val="accent1">
+              <a:shade val="15000"/>
+            </a:schemeClr>
+          </a:lnRef>
+          <a:fillRef idx="1">
+            <a:schemeClr val="accent1"/>
+          </a:fillRef>
+          <a:effectRef idx="0">
+            <a:schemeClr val="accent1"/>
+          </a:effectRef>
+          <a:fontRef idx="minor">
+            <a:schemeClr val="lt1"/>
+          </a:fontRef>
+        </p:style>
+        <p:txBody>
+          <a:bodyPr rtlCol="0" anchor="ctr"/>
+          <a:lstStyle/>
+          <a:p>
+            <a:pPr algn="ctr"/>
+            <a:r>
+              <a:rPr lang="en-US" b="1" dirty="0">
+                <a:solidFill>
+                  <a:srgbClr val="222222"/>
+                </a:solidFill>
+              </a:rPr>
+              <a:t>Is my </a:t>
+            </a:r>
+            <a:r>
+              <a:rPr lang="en-US" b="1" u="sng" dirty="0">
+                <a:solidFill>
+                  <a:srgbClr val="222222"/>
+                </a:solidFill>
+              </a:rPr>
+              <a:t>explanatory</a:t>
+            </a:r>
+            <a:r>
+              <a:rPr lang="en-US" b="1" dirty="0">
+                <a:solidFill>
+                  <a:srgbClr val="222222"/>
+                </a:solidFill>
+              </a:rPr>
+              <a:t> variable categorical?</a:t>
+            </a:r>
+          </a:p>
+        </p:txBody>
+      </p:sp>
+      <p:sp>
+        <p:nvSpPr>
+          <p:cNvPr id="15" name="Rounded Rectangle 14">
+            <a:extLst>
+              <a:ext uri="{FF2B5EF4-FFF2-40B4-BE49-F238E27FC236}">
+                <a16:creationId xmlns:a16="http://schemas.microsoft.com/office/drawing/2014/main" id="{6E09BE07-63F2-5D0E-E14F-E31161565546}"/>
+              </a:ext>
+            </a:extLst>
+          </p:cNvPr>
+          <p:cNvSpPr/>
+          <p:nvPr/>
+        </p:nvSpPr>
+        <p:spPr>
+          <a:xfrm>
+            <a:off x="1589120" y="2744636"/>
+            <a:ext cx="2784765" cy="756437"/>
+          </a:xfrm>
+          <a:prstGeom prst="roundRect">
+            <a:avLst/>
+          </a:prstGeom>
+          <a:solidFill>
+            <a:srgbClr val="FF6018"/>
+          </a:solidFill>
+          <a:ln>
+            <a:solidFill>
+              <a:srgbClr val="222222"/>
+            </a:solidFill>
+          </a:ln>
+        </p:spPr>
+        <p:style>
+          <a:lnRef idx="2">
+            <a:schemeClr val="accent1">
+              <a:shade val="15000"/>
+            </a:schemeClr>
+          </a:lnRef>
+          <a:fillRef idx="1">
+            <a:schemeClr val="accent1"/>
+          </a:fillRef>
+          <a:effectRef idx="0">
+            <a:schemeClr val="accent1"/>
+          </a:effectRef>
+          <a:fontRef idx="minor">
+            <a:schemeClr val="lt1"/>
+          </a:fontRef>
+        </p:style>
+        <p:txBody>
+          <a:bodyPr rtlCol="0" anchor="ctr"/>
+          <a:lstStyle/>
+          <a:p>
+            <a:pPr algn="ctr"/>
+            <a:r>
+              <a:rPr lang="en-US" b="1" dirty="0">
+                <a:solidFill>
+                  <a:srgbClr val="222222"/>
+                </a:solidFill>
+              </a:rPr>
+              <a:t>Is the </a:t>
+            </a:r>
+            <a:r>
+              <a:rPr lang="en-US" b="1" u="sng" dirty="0">
+                <a:solidFill>
+                  <a:srgbClr val="222222"/>
+                </a:solidFill>
+              </a:rPr>
+              <a:t>range</a:t>
+            </a:r>
+            <a:r>
+              <a:rPr lang="en-US" b="1" dirty="0">
+                <a:solidFill>
+                  <a:srgbClr val="222222"/>
+                </a:solidFill>
+              </a:rPr>
+              <a:t> of the data what’s important?</a:t>
+            </a:r>
+          </a:p>
+        </p:txBody>
+      </p:sp>
+      <p:sp>
+        <p:nvSpPr>
+          <p:cNvPr id="16" name="Rounded Rectangle 15">
+            <a:extLst>
+              <a:ext uri="{FF2B5EF4-FFF2-40B4-BE49-F238E27FC236}">
+                <a16:creationId xmlns:a16="http://schemas.microsoft.com/office/drawing/2014/main" id="{73766C19-349A-EB46-4202-425D27689CE5}"/>
+              </a:ext>
+            </a:extLst>
+          </p:cNvPr>
+          <p:cNvSpPr/>
+          <p:nvPr/>
+        </p:nvSpPr>
+        <p:spPr>
+          <a:xfrm>
+            <a:off x="9979238" y="4832166"/>
+            <a:ext cx="1907264" cy="576574"/>
+          </a:xfrm>
+          <a:prstGeom prst="roundRect">
+            <a:avLst/>
+          </a:prstGeom>
+          <a:solidFill>
+            <a:srgbClr val="725EEC"/>
+          </a:solidFill>
+          <a:ln>
+            <a:solidFill>
+              <a:srgbClr val="222222"/>
+            </a:solidFill>
+          </a:ln>
+        </p:spPr>
+        <p:style>
+          <a:lnRef idx="2">
+            <a:schemeClr val="accent1">
+              <a:shade val="15000"/>
+            </a:schemeClr>
+          </a:lnRef>
+          <a:fillRef idx="1">
+            <a:schemeClr val="accent1"/>
+          </a:fillRef>
+          <a:effectRef idx="0">
+            <a:schemeClr val="accent1"/>
+          </a:effectRef>
+          <a:fontRef idx="minor">
+            <a:schemeClr val="lt1"/>
+          </a:fontRef>
+        </p:style>
+        <p:txBody>
+          <a:bodyPr rtlCol="0" anchor="ctr"/>
+          <a:lstStyle/>
+          <a:p>
+            <a:pPr algn="ctr"/>
+            <a:r>
+              <a:rPr lang="en-US" sz="2800" b="1" dirty="0">
+                <a:solidFill>
+                  <a:srgbClr val="725EEC"/>
+                </a:solidFill>
+              </a:rPr>
+              <a:t>Scatterplot</a:t>
+            </a:r>
+          </a:p>
+        </p:txBody>
+      </p:sp>
+      <p:sp>
+        <p:nvSpPr>
+          <p:cNvPr id="17" name="Rounded Rectangle 16">
+            <a:extLst>
+              <a:ext uri="{FF2B5EF4-FFF2-40B4-BE49-F238E27FC236}">
+                <a16:creationId xmlns:a16="http://schemas.microsoft.com/office/drawing/2014/main" id="{581E3816-74B3-3FFB-5D67-6BF141D6B480}"/>
+              </a:ext>
+            </a:extLst>
+          </p:cNvPr>
+          <p:cNvSpPr/>
+          <p:nvPr/>
+        </p:nvSpPr>
+        <p:spPr>
+          <a:xfrm>
+            <a:off x="7194473" y="4832166"/>
+            <a:ext cx="1907264" cy="576574"/>
+          </a:xfrm>
+          <a:prstGeom prst="roundRect">
+            <a:avLst/>
+          </a:prstGeom>
+          <a:solidFill>
+            <a:srgbClr val="725EEC"/>
+          </a:solidFill>
+          <a:ln>
+            <a:solidFill>
+              <a:srgbClr val="222222"/>
+            </a:solidFill>
+          </a:ln>
+        </p:spPr>
+        <p:style>
+          <a:lnRef idx="2">
+            <a:schemeClr val="accent1">
+              <a:shade val="15000"/>
+            </a:schemeClr>
+          </a:lnRef>
+          <a:fillRef idx="1">
+            <a:schemeClr val="accent1"/>
+          </a:fillRef>
+          <a:effectRef idx="0">
+            <a:schemeClr val="accent1"/>
+          </a:effectRef>
+          <a:fontRef idx="minor">
+            <a:schemeClr val="lt1"/>
+          </a:fontRef>
+        </p:style>
+        <p:txBody>
+          <a:bodyPr rtlCol="0" anchor="ctr"/>
+          <a:lstStyle/>
+          <a:p>
+            <a:pPr algn="ctr"/>
+            <a:r>
+              <a:rPr lang="en-US" sz="2000" b="1" dirty="0">
+                <a:solidFill>
+                  <a:srgbClr val="725EEC"/>
+                </a:solidFill>
+              </a:rPr>
+              <a:t>Scatterplot + ”Best Fit” Line</a:t>
+            </a:r>
+          </a:p>
+        </p:txBody>
+      </p:sp>
+      <p:cxnSp>
+        <p:nvCxnSpPr>
+          <p:cNvPr id="20" name="Curved Connector 19">
+            <a:extLst>
+              <a:ext uri="{FF2B5EF4-FFF2-40B4-BE49-F238E27FC236}">
+                <a16:creationId xmlns:a16="http://schemas.microsoft.com/office/drawing/2014/main" id="{26D491FF-8E3A-2FA6-3DCC-6EF363FF62AC}"/>
+              </a:ext>
+            </a:extLst>
+          </p:cNvPr>
+          <p:cNvCxnSpPr>
+            <a:cxnSpLocks/>
+            <a:stCxn id="14" idx="2"/>
+            <a:endCxn id="24" idx="0"/>
+          </p:cNvCxnSpPr>
+          <p:nvPr/>
+        </p:nvCxnSpPr>
+        <p:spPr>
+          <a:xfrm rot="16200000" flipH="1">
+            <a:off x="7236983" y="570050"/>
+            <a:ext cx="1069003" cy="3538007"/>
+          </a:xfrm>
+          <a:prstGeom prst="curvedConnector3">
+            <a:avLst>
+              <a:gd name="adj1" fmla="val 50000"/>
+            </a:avLst>
+          </a:prstGeom>
+          <a:ln w="38100">
+            <a:solidFill>
+              <a:srgbClr val="FFB02F"/>
+            </a:solidFill>
+            <a:tailEnd type="triangle"/>
+          </a:ln>
+        </p:spPr>
+        <p:style>
+          <a:lnRef idx="1">
+            <a:schemeClr val="accent1"/>
+          </a:lnRef>
+          <a:fillRef idx="0">
+            <a:schemeClr val="accent1"/>
+          </a:fillRef>
+          <a:effectRef idx="0">
+            <a:schemeClr val="accent1"/>
+          </a:effectRef>
+          <a:fontRef idx="minor">
+            <a:schemeClr val="tx1"/>
+          </a:fontRef>
+        </p:style>
+      </p:cxnSp>
+      <p:cxnSp>
+        <p:nvCxnSpPr>
+          <p:cNvPr id="23" name="Curved Connector 22">
+            <a:extLst>
+              <a:ext uri="{FF2B5EF4-FFF2-40B4-BE49-F238E27FC236}">
+                <a16:creationId xmlns:a16="http://schemas.microsoft.com/office/drawing/2014/main" id="{100EBC6C-94B6-DA79-5611-CB5883B87781}"/>
+              </a:ext>
+            </a:extLst>
+          </p:cNvPr>
+          <p:cNvCxnSpPr>
+            <a:cxnSpLocks/>
+            <a:stCxn id="14" idx="2"/>
+            <a:endCxn id="15" idx="0"/>
+          </p:cNvCxnSpPr>
+          <p:nvPr/>
+        </p:nvCxnSpPr>
+        <p:spPr>
+          <a:xfrm rot="5400000">
+            <a:off x="4021951" y="764105"/>
+            <a:ext cx="940083" cy="3020978"/>
+          </a:xfrm>
+          <a:prstGeom prst="curvedConnector3">
+            <a:avLst/>
+          </a:prstGeom>
+          <a:ln w="38100">
+            <a:solidFill>
+              <a:srgbClr val="DF227C"/>
+            </a:solidFill>
+            <a:tailEnd type="triangle"/>
+          </a:ln>
+        </p:spPr>
+        <p:style>
+          <a:lnRef idx="1">
+            <a:schemeClr val="accent1"/>
+          </a:lnRef>
+          <a:fillRef idx="0">
+            <a:schemeClr val="accent1"/>
+          </a:fillRef>
+          <a:effectRef idx="0">
+            <a:schemeClr val="accent1"/>
+          </a:effectRef>
+          <a:fontRef idx="minor">
+            <a:schemeClr val="tx1"/>
+          </a:fontRef>
+        </p:style>
+      </p:cxnSp>
+      <p:sp>
+        <p:nvSpPr>
+          <p:cNvPr id="24" name="Rounded Rectangle 23">
+            <a:extLst>
+              <a:ext uri="{FF2B5EF4-FFF2-40B4-BE49-F238E27FC236}">
+                <a16:creationId xmlns:a16="http://schemas.microsoft.com/office/drawing/2014/main" id="{6F85D9EA-9743-0227-2A48-B34D12A52F51}"/>
+              </a:ext>
+            </a:extLst>
+          </p:cNvPr>
+          <p:cNvSpPr/>
+          <p:nvPr/>
+        </p:nvSpPr>
+        <p:spPr>
+          <a:xfrm>
+            <a:off x="8148105" y="2873556"/>
+            <a:ext cx="2784765" cy="498596"/>
+          </a:xfrm>
+          <a:prstGeom prst="roundRect">
+            <a:avLst/>
+          </a:prstGeom>
+          <a:solidFill>
+            <a:srgbClr val="FF6018"/>
+          </a:solidFill>
+          <a:ln>
+            <a:solidFill>
+              <a:srgbClr val="222222"/>
+            </a:solidFill>
+          </a:ln>
+        </p:spPr>
+        <p:style>
+          <a:lnRef idx="2">
+            <a:schemeClr val="accent1">
+              <a:shade val="15000"/>
+            </a:schemeClr>
+          </a:lnRef>
+          <a:fillRef idx="1">
+            <a:schemeClr val="accent1"/>
+          </a:fillRef>
+          <a:effectRef idx="0">
+            <a:schemeClr val="accent1"/>
+          </a:effectRef>
+          <a:fontRef idx="minor">
+            <a:schemeClr val="lt1"/>
+          </a:fontRef>
+        </p:style>
+        <p:txBody>
+          <a:bodyPr rtlCol="0" anchor="ctr"/>
+          <a:lstStyle/>
+          <a:p>
+            <a:pPr algn="ctr"/>
+            <a:r>
+              <a:rPr lang="en-US" b="1" dirty="0">
+                <a:solidFill>
+                  <a:srgbClr val="FF6018"/>
+                </a:solidFill>
+              </a:rPr>
+              <a:t>Do I care about the </a:t>
+            </a:r>
+            <a:r>
+              <a:rPr lang="en-US" b="1" u="sng" dirty="0">
+                <a:solidFill>
+                  <a:srgbClr val="FF6018"/>
+                </a:solidFill>
+              </a:rPr>
+              <a:t>trend</a:t>
+            </a:r>
+            <a:r>
+              <a:rPr lang="en-US" b="1" dirty="0">
+                <a:solidFill>
+                  <a:srgbClr val="FF6018"/>
+                </a:solidFill>
+              </a:rPr>
+              <a:t>?</a:t>
+            </a:r>
+          </a:p>
+        </p:txBody>
+      </p:sp>
+      <p:cxnSp>
+        <p:nvCxnSpPr>
+          <p:cNvPr id="25" name="Curved Connector 24">
+            <a:extLst>
+              <a:ext uri="{FF2B5EF4-FFF2-40B4-BE49-F238E27FC236}">
+                <a16:creationId xmlns:a16="http://schemas.microsoft.com/office/drawing/2014/main" id="{7C842EF5-A488-8B7B-1A7E-1FBE03004E27}"/>
+              </a:ext>
+            </a:extLst>
+          </p:cNvPr>
+          <p:cNvCxnSpPr>
+            <a:cxnSpLocks/>
+            <a:stCxn id="24" idx="2"/>
+            <a:endCxn id="16" idx="0"/>
+          </p:cNvCxnSpPr>
+          <p:nvPr/>
+        </p:nvCxnSpPr>
+        <p:spPr>
+          <a:xfrm rot="16200000" flipH="1">
+            <a:off x="9506672" y="3405968"/>
+            <a:ext cx="1460014" cy="1392382"/>
+          </a:xfrm>
+          <a:prstGeom prst="curvedConnector3">
+            <a:avLst>
+              <a:gd name="adj1" fmla="val 50000"/>
+            </a:avLst>
+          </a:prstGeom>
+          <a:ln w="38100">
+            <a:solidFill>
+              <a:srgbClr val="FFB02F"/>
+            </a:solidFill>
+            <a:tailEnd type="triangle"/>
+          </a:ln>
+        </p:spPr>
+        <p:style>
+          <a:lnRef idx="1">
+            <a:schemeClr val="accent1"/>
+          </a:lnRef>
+          <a:fillRef idx="0">
+            <a:schemeClr val="accent1"/>
+          </a:fillRef>
+          <a:effectRef idx="0">
+            <a:schemeClr val="accent1"/>
+          </a:effectRef>
+          <a:fontRef idx="minor">
+            <a:schemeClr val="tx1"/>
+          </a:fontRef>
+        </p:style>
+      </p:cxnSp>
+      <p:cxnSp>
+        <p:nvCxnSpPr>
+          <p:cNvPr id="29" name="Curved Connector 28">
+            <a:extLst>
+              <a:ext uri="{FF2B5EF4-FFF2-40B4-BE49-F238E27FC236}">
+                <a16:creationId xmlns:a16="http://schemas.microsoft.com/office/drawing/2014/main" id="{DE6A643F-D4F9-2E5B-C58A-90D1ED465AE8}"/>
+              </a:ext>
+            </a:extLst>
+          </p:cNvPr>
+          <p:cNvCxnSpPr>
+            <a:cxnSpLocks/>
+            <a:stCxn id="24" idx="2"/>
+            <a:endCxn id="17" idx="0"/>
+          </p:cNvCxnSpPr>
+          <p:nvPr/>
+        </p:nvCxnSpPr>
+        <p:spPr>
+          <a:xfrm rot="5400000">
+            <a:off x="8114290" y="3405968"/>
+            <a:ext cx="1460014" cy="1392383"/>
+          </a:xfrm>
+          <a:prstGeom prst="curvedConnector3">
+            <a:avLst>
+              <a:gd name="adj1" fmla="val 50000"/>
+            </a:avLst>
+          </a:prstGeom>
+          <a:ln w="38100">
+            <a:solidFill>
+              <a:srgbClr val="DF227C"/>
+            </a:solidFill>
+            <a:tailEnd type="triangle"/>
+          </a:ln>
+        </p:spPr>
+        <p:style>
+          <a:lnRef idx="1">
+            <a:schemeClr val="accent1"/>
+          </a:lnRef>
+          <a:fillRef idx="0">
+            <a:schemeClr val="accent1"/>
+          </a:fillRef>
+          <a:effectRef idx="0">
+            <a:schemeClr val="accent1"/>
+          </a:effectRef>
+          <a:fontRef idx="minor">
+            <a:schemeClr val="tx1"/>
+          </a:fontRef>
+        </p:style>
+      </p:cxnSp>
+      <p:sp>
+        <p:nvSpPr>
+          <p:cNvPr id="40" name="TextBox 39">
+            <a:extLst>
+              <a:ext uri="{FF2B5EF4-FFF2-40B4-BE49-F238E27FC236}">
+                <a16:creationId xmlns:a16="http://schemas.microsoft.com/office/drawing/2014/main" id="{7D5A9F1F-7CD6-3BB1-3B4C-FB32181A673A}"/>
+              </a:ext>
+            </a:extLst>
+          </p:cNvPr>
+          <p:cNvSpPr txBox="1"/>
+          <p:nvPr/>
+        </p:nvSpPr>
+        <p:spPr>
+          <a:xfrm>
+            <a:off x="7459681" y="1980880"/>
+            <a:ext cx="460382" cy="369332"/>
+          </a:xfrm>
+          <a:prstGeom prst="rect">
+            <a:avLst/>
+          </a:prstGeom>
+          <a:noFill/>
+        </p:spPr>
+        <p:txBody>
+          <a:bodyPr wrap="none" rtlCol="0">
+            <a:spAutoFit/>
+          </a:bodyPr>
+          <a:lstStyle/>
+          <a:p>
+            <a:r>
+              <a:rPr lang="en-US" b="1" dirty="0">
+                <a:solidFill>
+                  <a:srgbClr val="FFB02F"/>
+                </a:solidFill>
+              </a:rPr>
+              <a:t>No</a:t>
+            </a:r>
+          </a:p>
+        </p:txBody>
+      </p:sp>
+      <p:sp>
+        <p:nvSpPr>
+          <p:cNvPr id="41" name="TextBox 40">
+            <a:extLst>
+              <a:ext uri="{FF2B5EF4-FFF2-40B4-BE49-F238E27FC236}">
+                <a16:creationId xmlns:a16="http://schemas.microsoft.com/office/drawing/2014/main" id="{40583B94-B25B-542F-87C2-61D5C1126087}"/>
+              </a:ext>
+            </a:extLst>
+          </p:cNvPr>
+          <p:cNvSpPr txBox="1"/>
+          <p:nvPr/>
+        </p:nvSpPr>
+        <p:spPr>
+          <a:xfrm>
+            <a:off x="10236679" y="3686082"/>
+            <a:ext cx="460382" cy="369332"/>
+          </a:xfrm>
+          <a:prstGeom prst="rect">
+            <a:avLst/>
+          </a:prstGeom>
+          <a:noFill/>
+        </p:spPr>
+        <p:txBody>
+          <a:bodyPr wrap="none" rtlCol="0">
+            <a:spAutoFit/>
+          </a:bodyPr>
+          <a:lstStyle/>
+          <a:p>
+            <a:r>
+              <a:rPr lang="en-US" b="1" dirty="0">
+                <a:solidFill>
+                  <a:srgbClr val="FFB02F"/>
+                </a:solidFill>
+              </a:rPr>
+              <a:t>No</a:t>
+            </a:r>
+          </a:p>
+        </p:txBody>
+      </p:sp>
+      <p:sp>
+        <p:nvSpPr>
+          <p:cNvPr id="42" name="TextBox 41">
+            <a:extLst>
+              <a:ext uri="{FF2B5EF4-FFF2-40B4-BE49-F238E27FC236}">
+                <a16:creationId xmlns:a16="http://schemas.microsoft.com/office/drawing/2014/main" id="{CEFDDBD3-41E2-0C76-9B87-9C02CAA876F7}"/>
+              </a:ext>
+            </a:extLst>
+          </p:cNvPr>
+          <p:cNvSpPr txBox="1"/>
+          <p:nvPr/>
+        </p:nvSpPr>
+        <p:spPr>
+          <a:xfrm>
+            <a:off x="8452575" y="3686082"/>
+            <a:ext cx="493212" cy="369332"/>
+          </a:xfrm>
+          <a:prstGeom prst="rect">
+            <a:avLst/>
+          </a:prstGeom>
+          <a:noFill/>
+        </p:spPr>
+        <p:txBody>
+          <a:bodyPr wrap="none" rtlCol="0">
+            <a:spAutoFit/>
+          </a:bodyPr>
+          <a:lstStyle/>
+          <a:p>
+            <a:r>
+              <a:rPr lang="en-US" b="1" dirty="0">
+                <a:solidFill>
+                  <a:srgbClr val="DF227C"/>
+                </a:solidFill>
+              </a:rPr>
+              <a:t>Yes</a:t>
+            </a:r>
+          </a:p>
+        </p:txBody>
+      </p:sp>
+      <p:sp>
+        <p:nvSpPr>
+          <p:cNvPr id="47" name="TextBox 46">
+            <a:extLst>
+              <a:ext uri="{FF2B5EF4-FFF2-40B4-BE49-F238E27FC236}">
+                <a16:creationId xmlns:a16="http://schemas.microsoft.com/office/drawing/2014/main" id="{BDB2F61A-80B4-27C6-2982-E1E0FF94547E}"/>
+              </a:ext>
+            </a:extLst>
+          </p:cNvPr>
+          <p:cNvSpPr txBox="1"/>
+          <p:nvPr/>
+        </p:nvSpPr>
+        <p:spPr>
+          <a:xfrm>
+            <a:off x="4298675" y="1935529"/>
+            <a:ext cx="493212" cy="369332"/>
+          </a:xfrm>
+          <a:prstGeom prst="rect">
+            <a:avLst/>
+          </a:prstGeom>
+          <a:noFill/>
+        </p:spPr>
+        <p:txBody>
+          <a:bodyPr wrap="none" rtlCol="0">
+            <a:spAutoFit/>
+          </a:bodyPr>
+          <a:lstStyle/>
+          <a:p>
+            <a:r>
+              <a:rPr lang="en-US" b="1" dirty="0">
+                <a:solidFill>
+                  <a:srgbClr val="DF227C"/>
+                </a:solidFill>
+              </a:rPr>
+              <a:t>Yes</a:t>
+            </a:r>
+          </a:p>
+        </p:txBody>
+      </p:sp>
+      <p:cxnSp>
+        <p:nvCxnSpPr>
+          <p:cNvPr id="61" name="Curved Connector 60">
+            <a:extLst>
+              <a:ext uri="{FF2B5EF4-FFF2-40B4-BE49-F238E27FC236}">
+                <a16:creationId xmlns:a16="http://schemas.microsoft.com/office/drawing/2014/main" id="{0062FC38-DCE8-FF36-E7F5-C8FB2AA1FD21}"/>
+              </a:ext>
+            </a:extLst>
+          </p:cNvPr>
+          <p:cNvCxnSpPr>
+            <a:cxnSpLocks/>
+            <a:stCxn id="15" idx="2"/>
+            <a:endCxn id="67" idx="0"/>
+          </p:cNvCxnSpPr>
+          <p:nvPr/>
+        </p:nvCxnSpPr>
+        <p:spPr>
+          <a:xfrm rot="16200000" flipH="1">
+            <a:off x="3012148" y="3470428"/>
+            <a:ext cx="1331093" cy="1392382"/>
+          </a:xfrm>
+          <a:prstGeom prst="curvedConnector3">
+            <a:avLst>
+              <a:gd name="adj1" fmla="val 50000"/>
+            </a:avLst>
+          </a:prstGeom>
+          <a:ln w="38100">
+            <a:solidFill>
+              <a:srgbClr val="FFB02F"/>
+            </a:solidFill>
+            <a:tailEnd type="triangle"/>
+          </a:ln>
+        </p:spPr>
+        <p:style>
+          <a:lnRef idx="1">
+            <a:schemeClr val="accent1"/>
+          </a:lnRef>
+          <a:fillRef idx="0">
+            <a:schemeClr val="accent1"/>
+          </a:fillRef>
+          <a:effectRef idx="0">
+            <a:schemeClr val="accent1"/>
+          </a:effectRef>
+          <a:fontRef idx="minor">
+            <a:schemeClr val="tx1"/>
+          </a:fontRef>
+        </p:style>
+      </p:cxnSp>
+      <p:cxnSp>
+        <p:nvCxnSpPr>
+          <p:cNvPr id="62" name="Curved Connector 61">
+            <a:extLst>
+              <a:ext uri="{FF2B5EF4-FFF2-40B4-BE49-F238E27FC236}">
+                <a16:creationId xmlns:a16="http://schemas.microsoft.com/office/drawing/2014/main" id="{F307BD37-CE6A-8205-9852-7653BE00F5E2}"/>
+              </a:ext>
+            </a:extLst>
+          </p:cNvPr>
+          <p:cNvCxnSpPr>
+            <a:cxnSpLocks/>
+            <a:stCxn id="15" idx="2"/>
+            <a:endCxn id="68" idx="0"/>
+          </p:cNvCxnSpPr>
+          <p:nvPr/>
+        </p:nvCxnSpPr>
+        <p:spPr>
+          <a:xfrm rot="5400000">
+            <a:off x="1619766" y="3470428"/>
+            <a:ext cx="1331093" cy="1392383"/>
+          </a:xfrm>
+          <a:prstGeom prst="curvedConnector3">
+            <a:avLst>
+              <a:gd name="adj1" fmla="val 50000"/>
+            </a:avLst>
+          </a:prstGeom>
+          <a:ln w="38100">
+            <a:solidFill>
+              <a:srgbClr val="DF227C"/>
+            </a:solidFill>
+            <a:tailEnd type="triangle"/>
+          </a:ln>
+        </p:spPr>
+        <p:style>
+          <a:lnRef idx="1">
+            <a:schemeClr val="accent1"/>
+          </a:lnRef>
+          <a:fillRef idx="0">
+            <a:schemeClr val="accent1"/>
+          </a:fillRef>
+          <a:effectRef idx="0">
+            <a:schemeClr val="accent1"/>
+          </a:effectRef>
+          <a:fontRef idx="minor">
+            <a:schemeClr val="tx1"/>
+          </a:fontRef>
+        </p:style>
+      </p:cxnSp>
+      <p:sp>
+        <p:nvSpPr>
+          <p:cNvPr id="63" name="TextBox 62">
+            <a:extLst>
+              <a:ext uri="{FF2B5EF4-FFF2-40B4-BE49-F238E27FC236}">
+                <a16:creationId xmlns:a16="http://schemas.microsoft.com/office/drawing/2014/main" id="{9499BADC-267E-5F21-3D86-E8DAD7506BD7}"/>
+              </a:ext>
+            </a:extLst>
+          </p:cNvPr>
+          <p:cNvSpPr txBox="1"/>
+          <p:nvPr/>
+        </p:nvSpPr>
+        <p:spPr>
+          <a:xfrm>
+            <a:off x="3606044" y="3797287"/>
+            <a:ext cx="460382" cy="369332"/>
+          </a:xfrm>
+          <a:prstGeom prst="rect">
+            <a:avLst/>
+          </a:prstGeom>
+          <a:noFill/>
+        </p:spPr>
+        <p:txBody>
+          <a:bodyPr wrap="none" rtlCol="0">
+            <a:spAutoFit/>
+          </a:bodyPr>
+          <a:lstStyle/>
+          <a:p>
+            <a:r>
+              <a:rPr lang="en-US" b="1" dirty="0">
+                <a:solidFill>
+                  <a:srgbClr val="FFB02F"/>
+                </a:solidFill>
+              </a:rPr>
+              <a:t>No</a:t>
+            </a:r>
+          </a:p>
+        </p:txBody>
+      </p:sp>
+      <p:sp>
+        <p:nvSpPr>
+          <p:cNvPr id="64" name="TextBox 63">
+            <a:extLst>
+              <a:ext uri="{FF2B5EF4-FFF2-40B4-BE49-F238E27FC236}">
+                <a16:creationId xmlns:a16="http://schemas.microsoft.com/office/drawing/2014/main" id="{777073CF-A303-FFB4-4388-F7DC7D4C005D}"/>
+              </a:ext>
+            </a:extLst>
+          </p:cNvPr>
+          <p:cNvSpPr txBox="1"/>
+          <p:nvPr/>
+        </p:nvSpPr>
+        <p:spPr>
+          <a:xfrm>
+            <a:off x="1932730" y="3797287"/>
+            <a:ext cx="493212" cy="369332"/>
+          </a:xfrm>
+          <a:prstGeom prst="rect">
+            <a:avLst/>
+          </a:prstGeom>
+          <a:noFill/>
+        </p:spPr>
+        <p:txBody>
+          <a:bodyPr wrap="none" rtlCol="0">
+            <a:spAutoFit/>
+          </a:bodyPr>
+          <a:lstStyle/>
+          <a:p>
+            <a:r>
+              <a:rPr lang="en-US" b="1" dirty="0">
+                <a:solidFill>
+                  <a:srgbClr val="DF227C"/>
+                </a:solidFill>
+              </a:rPr>
+              <a:t>Yes</a:t>
+            </a:r>
+          </a:p>
+        </p:txBody>
+      </p:sp>
+      <p:sp>
+        <p:nvSpPr>
+          <p:cNvPr id="67" name="Rounded Rectangle 66">
+            <a:extLst>
+              <a:ext uri="{FF2B5EF4-FFF2-40B4-BE49-F238E27FC236}">
+                <a16:creationId xmlns:a16="http://schemas.microsoft.com/office/drawing/2014/main" id="{55F7483A-9E3D-BF32-E495-B9FC3BB2640F}"/>
+              </a:ext>
+            </a:extLst>
+          </p:cNvPr>
+          <p:cNvSpPr/>
+          <p:nvPr/>
+        </p:nvSpPr>
+        <p:spPr>
+          <a:xfrm>
+            <a:off x="3420253" y="4832166"/>
+            <a:ext cx="1907264" cy="576574"/>
+          </a:xfrm>
+          <a:prstGeom prst="roundRect">
+            <a:avLst/>
+          </a:prstGeom>
+          <a:solidFill>
+            <a:srgbClr val="725EEC"/>
+          </a:solidFill>
+          <a:ln>
+            <a:solidFill>
+              <a:srgbClr val="222222"/>
+            </a:solidFill>
+          </a:ln>
+        </p:spPr>
+        <p:style>
+          <a:lnRef idx="2">
+            <a:schemeClr val="accent1">
+              <a:shade val="15000"/>
+            </a:schemeClr>
+          </a:lnRef>
+          <a:fillRef idx="1">
+            <a:schemeClr val="accent1"/>
+          </a:fillRef>
+          <a:effectRef idx="0">
+            <a:schemeClr val="accent1"/>
+          </a:effectRef>
+          <a:fontRef idx="minor">
+            <a:schemeClr val="lt1"/>
+          </a:fontRef>
+        </p:style>
+        <p:txBody>
+          <a:bodyPr rtlCol="0" anchor="ctr"/>
+          <a:lstStyle/>
+          <a:p>
+            <a:pPr algn="ctr"/>
+            <a:r>
+              <a:rPr lang="en-US" sz="2800" b="1" dirty="0">
+                <a:solidFill>
+                  <a:srgbClr val="725EEC"/>
+                </a:solidFill>
+              </a:rPr>
+              <a:t>Bar Graph</a:t>
+            </a:r>
+          </a:p>
+        </p:txBody>
+      </p:sp>
+      <p:sp>
+        <p:nvSpPr>
+          <p:cNvPr id="68" name="Rounded Rectangle 67">
+            <a:extLst>
+              <a:ext uri="{FF2B5EF4-FFF2-40B4-BE49-F238E27FC236}">
+                <a16:creationId xmlns:a16="http://schemas.microsoft.com/office/drawing/2014/main" id="{C26AAF97-9DB3-C0A2-9777-377A965E6E3B}"/>
+              </a:ext>
+            </a:extLst>
+          </p:cNvPr>
+          <p:cNvSpPr/>
+          <p:nvPr/>
+        </p:nvSpPr>
+        <p:spPr>
+          <a:xfrm>
+            <a:off x="635488" y="4832166"/>
+            <a:ext cx="1907264" cy="576574"/>
+          </a:xfrm>
+          <a:prstGeom prst="roundRect">
+            <a:avLst/>
+          </a:prstGeom>
+          <a:solidFill>
+            <a:srgbClr val="725EEC"/>
+          </a:solidFill>
+          <a:ln>
+            <a:solidFill>
+              <a:srgbClr val="222222"/>
+            </a:solidFill>
+          </a:ln>
+        </p:spPr>
+        <p:style>
+          <a:lnRef idx="2">
+            <a:schemeClr val="accent1">
+              <a:shade val="15000"/>
+            </a:schemeClr>
+          </a:lnRef>
+          <a:fillRef idx="1">
+            <a:schemeClr val="accent1"/>
+          </a:fillRef>
+          <a:effectRef idx="0">
+            <a:schemeClr val="accent1"/>
+          </a:effectRef>
+          <a:fontRef idx="minor">
+            <a:schemeClr val="lt1"/>
+          </a:fontRef>
+        </p:style>
+        <p:txBody>
+          <a:bodyPr rtlCol="0" anchor="ctr"/>
+          <a:lstStyle/>
+          <a:p>
+            <a:pPr algn="ctr"/>
+            <a:r>
+              <a:rPr lang="en-US" sz="2000" b="1" dirty="0">
+                <a:solidFill>
+                  <a:srgbClr val="725EEC"/>
+                </a:solidFill>
+              </a:rPr>
+              <a:t>Boxplot / </a:t>
+            </a:r>
+          </a:p>
+          <a:p>
+            <a:pPr algn="ctr"/>
+            <a:r>
+              <a:rPr lang="en-US" sz="2000" b="1" dirty="0">
+                <a:solidFill>
+                  <a:srgbClr val="725EEC"/>
+                </a:solidFill>
+              </a:rPr>
+              <a:t>Violin Plot</a:t>
+            </a:r>
+          </a:p>
+        </p:txBody>
+      </p:sp>
+    </p:spTree>
+    <p:extLst>
+      <p:ext uri="{BB962C8B-B14F-4D97-AF65-F5344CB8AC3E}">
+        <p14:creationId xmlns:p14="http://schemas.microsoft.com/office/powerpoint/2010/main" val="3622448670"/>
+      </p:ext>
+    </p:extLst>
+  </p:cSld>
+  <p:clrMapOvr>
+    <a:masterClrMapping/>
+  </p:clrMapOvr>
+</p:sld>
+</file>
+
+<file path=ppt/slides/slide6.xml><?xml version="1.0" encoding="utf-8"?>
+<p:sld xmlns:a="http://schemas.openxmlformats.org/drawingml/2006/main" xmlns:r="http://schemas.openxmlformats.org/officeDocument/2006/relationships" xmlns:p="http://schemas.openxmlformats.org/presentationml/2006/main">
+  <p:cSld>
+    <p:spTree>
+      <p:nvGrpSpPr>
+        <p:cNvPr id="1" name="">
+          <a:extLst>
+            <a:ext uri="{FF2B5EF4-FFF2-40B4-BE49-F238E27FC236}">
+              <a16:creationId xmlns:a16="http://schemas.microsoft.com/office/drawing/2014/main" id="{93AF3070-5466-6EC3-73A7-FD5C72D67BAF}"/>
+            </a:ext>
+          </a:extLst>
+        </p:cNvPr>
+        <p:cNvGrpSpPr/>
+        <p:nvPr/>
+      </p:nvGrpSpPr>
+      <p:grpSpPr>
+        <a:xfrm>
+          <a:off x="0" y="0"/>
+          <a:ext cx="0" cy="0"/>
+          <a:chOff x="0" y="0"/>
+          <a:chExt cx="0" cy="0"/>
+        </a:xfrm>
+      </p:grpSpPr>
+      <p:sp>
+        <p:nvSpPr>
+          <p:cNvPr id="3" name="Title 1">
+            <a:extLst>
+              <a:ext uri="{FF2B5EF4-FFF2-40B4-BE49-F238E27FC236}">
+                <a16:creationId xmlns:a16="http://schemas.microsoft.com/office/drawing/2014/main" id="{332CB21D-5B1C-0E0B-FA12-173A504F60D3}"/>
+              </a:ext>
+            </a:extLst>
+          </p:cNvPr>
+          <p:cNvSpPr txBox="1">
+            <a:spLocks/>
+          </p:cNvSpPr>
+          <p:nvPr/>
+        </p:nvSpPr>
+        <p:spPr>
+          <a:xfrm>
+            <a:off x="0" y="0"/>
+            <a:ext cx="3323063" cy="373232"/>
+          </a:xfrm>
+          <a:prstGeom prst="rect">
+            <a:avLst/>
+          </a:prstGeom>
+          <a:solidFill>
+            <a:srgbClr val="725EEC"/>
+          </a:solidFill>
+        </p:spPr>
+        <p:txBody>
+          <a:bodyPr vert="horz" lIns="91440" tIns="45720" rIns="91440" bIns="45720" rtlCol="0" anchor="ctr">
+            <a:noAutofit/>
+          </a:bodyPr>
+          <a:lstStyle>
+            <a:lvl1pPr algn="ctr" defTabSz="914400" rtl="0" eaLnBrk="1" latinLnBrk="0" hangingPunct="1">
+              <a:lnSpc>
+                <a:spcPct val="90000"/>
+              </a:lnSpc>
+              <a:spcBef>
+                <a:spcPct val="0"/>
+              </a:spcBef>
+              <a:buNone/>
+              <a:defRPr sz="6000" kern="1200">
+                <a:solidFill>
+                  <a:schemeClr val="tx1"/>
+                </a:solidFill>
+                <a:latin typeface="+mj-lt"/>
+                <a:ea typeface="+mj-ea"/>
+                <a:cs typeface="+mj-cs"/>
+              </a:defRPr>
+            </a:lvl1pPr>
+          </a:lstStyle>
+          <a:p>
+            <a:pPr algn="l"/>
+            <a:r>
+              <a:rPr lang="en-US" sz="1800" dirty="0">
+                <a:solidFill>
+                  <a:schemeClr val="bg1"/>
+                </a:solidFill>
+                <a:latin typeface="+mn-lt"/>
+                <a:cs typeface="Arial" panose="020B0604020202020204" pitchFamily="34" charset="0"/>
+              </a:rPr>
+              <a:t>viz-roadmap-03.png</a:t>
+            </a:r>
+          </a:p>
+        </p:txBody>
+      </p:sp>
+      <p:sp>
+        <p:nvSpPr>
+          <p:cNvPr id="14" name="Rounded Rectangle 13">
+            <a:extLst>
+              <a:ext uri="{FF2B5EF4-FFF2-40B4-BE49-F238E27FC236}">
+                <a16:creationId xmlns:a16="http://schemas.microsoft.com/office/drawing/2014/main" id="{47EF5F33-B89D-605D-34C9-DB17C4A535F1}"/>
+              </a:ext>
+            </a:extLst>
+          </p:cNvPr>
+          <p:cNvSpPr/>
+          <p:nvPr/>
+        </p:nvSpPr>
+        <p:spPr>
+          <a:xfrm>
+            <a:off x="3781573" y="1336962"/>
+            <a:ext cx="4441816" cy="467591"/>
+          </a:xfrm>
+          <a:prstGeom prst="roundRect">
+            <a:avLst/>
+          </a:prstGeom>
+          <a:solidFill>
+            <a:srgbClr val="FF6018"/>
+          </a:solidFill>
+          <a:ln>
+            <a:solidFill>
+              <a:srgbClr val="222222"/>
+            </a:solidFill>
+          </a:ln>
+        </p:spPr>
+        <p:style>
+          <a:lnRef idx="2">
+            <a:schemeClr val="accent1">
+              <a:shade val="15000"/>
+            </a:schemeClr>
+          </a:lnRef>
+          <a:fillRef idx="1">
+            <a:schemeClr val="accent1"/>
+          </a:fillRef>
+          <a:effectRef idx="0">
+            <a:schemeClr val="accent1"/>
+          </a:effectRef>
+          <a:fontRef idx="minor">
+            <a:schemeClr val="lt1"/>
+          </a:fontRef>
+        </p:style>
+        <p:txBody>
+          <a:bodyPr rtlCol="0" anchor="ctr"/>
+          <a:lstStyle/>
+          <a:p>
+            <a:pPr algn="ctr"/>
+            <a:r>
+              <a:rPr lang="en-US" b="1" dirty="0">
+                <a:solidFill>
+                  <a:srgbClr val="222222"/>
+                </a:solidFill>
+              </a:rPr>
+              <a:t>Is my </a:t>
+            </a:r>
+            <a:r>
+              <a:rPr lang="en-US" b="1" u="sng" dirty="0">
+                <a:solidFill>
+                  <a:srgbClr val="222222"/>
+                </a:solidFill>
+              </a:rPr>
+              <a:t>explanatory</a:t>
+            </a:r>
+            <a:r>
+              <a:rPr lang="en-US" b="1" dirty="0">
+                <a:solidFill>
+                  <a:srgbClr val="222222"/>
+                </a:solidFill>
+              </a:rPr>
+              <a:t> variable categorical?</a:t>
+            </a:r>
+          </a:p>
+        </p:txBody>
+      </p:sp>
+      <p:sp>
+        <p:nvSpPr>
+          <p:cNvPr id="15" name="Rounded Rectangle 14">
+            <a:extLst>
+              <a:ext uri="{FF2B5EF4-FFF2-40B4-BE49-F238E27FC236}">
+                <a16:creationId xmlns:a16="http://schemas.microsoft.com/office/drawing/2014/main" id="{F75E48FC-34C7-F7A2-D4DF-DAC1D58721A5}"/>
+              </a:ext>
+            </a:extLst>
+          </p:cNvPr>
+          <p:cNvSpPr/>
+          <p:nvPr/>
+        </p:nvSpPr>
+        <p:spPr>
+          <a:xfrm>
+            <a:off x="1589120" y="2744636"/>
+            <a:ext cx="2784765" cy="756437"/>
+          </a:xfrm>
+          <a:prstGeom prst="roundRect">
+            <a:avLst/>
+          </a:prstGeom>
+          <a:solidFill>
+            <a:srgbClr val="FF6018"/>
+          </a:solidFill>
+          <a:ln>
+            <a:solidFill>
+              <a:srgbClr val="222222"/>
+            </a:solidFill>
+          </a:ln>
+        </p:spPr>
+        <p:style>
+          <a:lnRef idx="2">
+            <a:schemeClr val="accent1">
+              <a:shade val="15000"/>
+            </a:schemeClr>
+          </a:lnRef>
+          <a:fillRef idx="1">
+            <a:schemeClr val="accent1"/>
+          </a:fillRef>
+          <a:effectRef idx="0">
+            <a:schemeClr val="accent1"/>
+          </a:effectRef>
+          <a:fontRef idx="minor">
+            <a:schemeClr val="lt1"/>
+          </a:fontRef>
+        </p:style>
+        <p:txBody>
+          <a:bodyPr rtlCol="0" anchor="ctr"/>
+          <a:lstStyle/>
+          <a:p>
+            <a:pPr algn="ctr"/>
+            <a:r>
+              <a:rPr lang="en-US" b="1" dirty="0">
+                <a:solidFill>
+                  <a:srgbClr val="222222"/>
+                </a:solidFill>
+              </a:rPr>
+              <a:t>Is the </a:t>
+            </a:r>
+            <a:r>
+              <a:rPr lang="en-US" b="1" u="sng" dirty="0">
+                <a:solidFill>
+                  <a:srgbClr val="222222"/>
+                </a:solidFill>
+              </a:rPr>
+              <a:t>range</a:t>
+            </a:r>
+            <a:r>
+              <a:rPr lang="en-US" b="1" dirty="0">
+                <a:solidFill>
+                  <a:srgbClr val="222222"/>
+                </a:solidFill>
+              </a:rPr>
+              <a:t> of the data what’s important?</a:t>
+            </a:r>
+          </a:p>
+        </p:txBody>
+      </p:sp>
+      <p:sp>
+        <p:nvSpPr>
+          <p:cNvPr id="16" name="Rounded Rectangle 15">
+            <a:extLst>
+              <a:ext uri="{FF2B5EF4-FFF2-40B4-BE49-F238E27FC236}">
+                <a16:creationId xmlns:a16="http://schemas.microsoft.com/office/drawing/2014/main" id="{0EE27554-CB12-CB31-E233-A75D69D4176A}"/>
+              </a:ext>
+            </a:extLst>
+          </p:cNvPr>
+          <p:cNvSpPr/>
+          <p:nvPr/>
+        </p:nvSpPr>
+        <p:spPr>
+          <a:xfrm>
+            <a:off x="9979238" y="4832166"/>
+            <a:ext cx="1907264" cy="576574"/>
+          </a:xfrm>
+          <a:prstGeom prst="roundRect">
+            <a:avLst/>
+          </a:prstGeom>
+          <a:solidFill>
+            <a:srgbClr val="725EEC"/>
+          </a:solidFill>
+          <a:ln>
+            <a:solidFill>
+              <a:srgbClr val="222222"/>
+            </a:solidFill>
+          </a:ln>
+        </p:spPr>
+        <p:style>
+          <a:lnRef idx="2">
+            <a:schemeClr val="accent1">
+              <a:shade val="15000"/>
+            </a:schemeClr>
+          </a:lnRef>
+          <a:fillRef idx="1">
+            <a:schemeClr val="accent1"/>
+          </a:fillRef>
+          <a:effectRef idx="0">
+            <a:schemeClr val="accent1"/>
+          </a:effectRef>
+          <a:fontRef idx="minor">
+            <a:schemeClr val="lt1"/>
+          </a:fontRef>
+        </p:style>
+        <p:txBody>
+          <a:bodyPr rtlCol="0" anchor="ctr"/>
+          <a:lstStyle/>
+          <a:p>
+            <a:pPr algn="ctr"/>
+            <a:r>
+              <a:rPr lang="en-US" sz="2800" b="1" dirty="0">
+                <a:solidFill>
+                  <a:srgbClr val="725EEC"/>
+                </a:solidFill>
+              </a:rPr>
+              <a:t>Scatterplot</a:t>
+            </a:r>
+          </a:p>
+        </p:txBody>
+      </p:sp>
+      <p:sp>
+        <p:nvSpPr>
+          <p:cNvPr id="17" name="Rounded Rectangle 16">
+            <a:extLst>
+              <a:ext uri="{FF2B5EF4-FFF2-40B4-BE49-F238E27FC236}">
+                <a16:creationId xmlns:a16="http://schemas.microsoft.com/office/drawing/2014/main" id="{7D162E69-714F-8FBA-F114-466923FA11BD}"/>
+              </a:ext>
+            </a:extLst>
+          </p:cNvPr>
+          <p:cNvSpPr/>
+          <p:nvPr/>
+        </p:nvSpPr>
+        <p:spPr>
+          <a:xfrm>
+            <a:off x="7194473" y="4832166"/>
+            <a:ext cx="1907264" cy="576574"/>
+          </a:xfrm>
+          <a:prstGeom prst="roundRect">
+            <a:avLst/>
+          </a:prstGeom>
+          <a:solidFill>
+            <a:srgbClr val="725EEC"/>
+          </a:solidFill>
+          <a:ln>
+            <a:solidFill>
+              <a:srgbClr val="222222"/>
+            </a:solidFill>
+          </a:ln>
+        </p:spPr>
+        <p:style>
+          <a:lnRef idx="2">
+            <a:schemeClr val="accent1">
+              <a:shade val="15000"/>
+            </a:schemeClr>
+          </a:lnRef>
+          <a:fillRef idx="1">
+            <a:schemeClr val="accent1"/>
+          </a:fillRef>
+          <a:effectRef idx="0">
+            <a:schemeClr val="accent1"/>
+          </a:effectRef>
+          <a:fontRef idx="minor">
+            <a:schemeClr val="lt1"/>
+          </a:fontRef>
+        </p:style>
+        <p:txBody>
+          <a:bodyPr rtlCol="0" anchor="ctr"/>
+          <a:lstStyle/>
+          <a:p>
+            <a:pPr algn="ctr"/>
+            <a:r>
+              <a:rPr lang="en-US" sz="2000" b="1" dirty="0">
+                <a:solidFill>
+                  <a:srgbClr val="725EEC"/>
+                </a:solidFill>
+              </a:rPr>
+              <a:t>Scatterplot + ”Best Fit” Line</a:t>
+            </a:r>
+          </a:p>
+        </p:txBody>
+      </p:sp>
+      <p:cxnSp>
+        <p:nvCxnSpPr>
+          <p:cNvPr id="20" name="Curved Connector 19">
+            <a:extLst>
+              <a:ext uri="{FF2B5EF4-FFF2-40B4-BE49-F238E27FC236}">
+                <a16:creationId xmlns:a16="http://schemas.microsoft.com/office/drawing/2014/main" id="{CA7ADC61-6FD4-9DBB-C9DA-F192850C5E14}"/>
+              </a:ext>
+            </a:extLst>
+          </p:cNvPr>
+          <p:cNvCxnSpPr>
+            <a:cxnSpLocks/>
+            <a:stCxn id="14" idx="2"/>
+            <a:endCxn id="24" idx="0"/>
+          </p:cNvCxnSpPr>
+          <p:nvPr/>
+        </p:nvCxnSpPr>
+        <p:spPr>
+          <a:xfrm rot="16200000" flipH="1">
+            <a:off x="7236983" y="570050"/>
+            <a:ext cx="1069003" cy="3538007"/>
+          </a:xfrm>
+          <a:prstGeom prst="curvedConnector3">
+            <a:avLst>
+              <a:gd name="adj1" fmla="val 50000"/>
+            </a:avLst>
+          </a:prstGeom>
+          <a:ln w="38100">
+            <a:solidFill>
+              <a:srgbClr val="FFB02F"/>
+            </a:solidFill>
+            <a:tailEnd type="triangle"/>
+          </a:ln>
+        </p:spPr>
+        <p:style>
+          <a:lnRef idx="1">
+            <a:schemeClr val="accent1"/>
+          </a:lnRef>
+          <a:fillRef idx="0">
+            <a:schemeClr val="accent1"/>
+          </a:fillRef>
+          <a:effectRef idx="0">
+            <a:schemeClr val="accent1"/>
+          </a:effectRef>
+          <a:fontRef idx="minor">
+            <a:schemeClr val="tx1"/>
+          </a:fontRef>
+        </p:style>
+      </p:cxnSp>
+      <p:cxnSp>
+        <p:nvCxnSpPr>
+          <p:cNvPr id="23" name="Curved Connector 22">
+            <a:extLst>
+              <a:ext uri="{FF2B5EF4-FFF2-40B4-BE49-F238E27FC236}">
+                <a16:creationId xmlns:a16="http://schemas.microsoft.com/office/drawing/2014/main" id="{E3746092-B76B-751A-45CD-C63985858AE7}"/>
+              </a:ext>
+            </a:extLst>
+          </p:cNvPr>
+          <p:cNvCxnSpPr>
+            <a:cxnSpLocks/>
+            <a:stCxn id="14" idx="2"/>
+            <a:endCxn id="15" idx="0"/>
+          </p:cNvCxnSpPr>
+          <p:nvPr/>
+        </p:nvCxnSpPr>
+        <p:spPr>
+          <a:xfrm rot="5400000">
+            <a:off x="4021951" y="764105"/>
+            <a:ext cx="940083" cy="3020978"/>
+          </a:xfrm>
+          <a:prstGeom prst="curvedConnector3">
+            <a:avLst/>
+          </a:prstGeom>
+          <a:ln w="38100">
+            <a:solidFill>
+              <a:srgbClr val="DF227C"/>
+            </a:solidFill>
+            <a:tailEnd type="triangle"/>
+          </a:ln>
+        </p:spPr>
+        <p:style>
+          <a:lnRef idx="1">
+            <a:schemeClr val="accent1"/>
+          </a:lnRef>
+          <a:fillRef idx="0">
+            <a:schemeClr val="accent1"/>
+          </a:fillRef>
+          <a:effectRef idx="0">
+            <a:schemeClr val="accent1"/>
+          </a:effectRef>
+          <a:fontRef idx="minor">
+            <a:schemeClr val="tx1"/>
+          </a:fontRef>
+        </p:style>
+      </p:cxnSp>
+      <p:sp>
+        <p:nvSpPr>
+          <p:cNvPr id="24" name="Rounded Rectangle 23">
+            <a:extLst>
+              <a:ext uri="{FF2B5EF4-FFF2-40B4-BE49-F238E27FC236}">
+                <a16:creationId xmlns:a16="http://schemas.microsoft.com/office/drawing/2014/main" id="{F8859825-EF0D-8591-32FB-71B41D44AC8A}"/>
+              </a:ext>
+            </a:extLst>
+          </p:cNvPr>
+          <p:cNvSpPr/>
+          <p:nvPr/>
+        </p:nvSpPr>
+        <p:spPr>
+          <a:xfrm>
+            <a:off x="8148105" y="2873556"/>
+            <a:ext cx="2784765" cy="498596"/>
+          </a:xfrm>
+          <a:prstGeom prst="roundRect">
+            <a:avLst/>
+          </a:prstGeom>
+          <a:solidFill>
+            <a:srgbClr val="FF6018"/>
+          </a:solidFill>
+          <a:ln>
+            <a:solidFill>
+              <a:srgbClr val="222222"/>
+            </a:solidFill>
+          </a:ln>
+        </p:spPr>
+        <p:style>
+          <a:lnRef idx="2">
+            <a:schemeClr val="accent1">
+              <a:shade val="15000"/>
+            </a:schemeClr>
+          </a:lnRef>
+          <a:fillRef idx="1">
+            <a:schemeClr val="accent1"/>
+          </a:fillRef>
+          <a:effectRef idx="0">
+            <a:schemeClr val="accent1"/>
+          </a:effectRef>
+          <a:fontRef idx="minor">
+            <a:schemeClr val="lt1"/>
+          </a:fontRef>
+        </p:style>
+        <p:txBody>
+          <a:bodyPr rtlCol="0" anchor="ctr"/>
+          <a:lstStyle/>
+          <a:p>
+            <a:pPr algn="ctr"/>
+            <a:r>
+              <a:rPr lang="en-US" b="1" dirty="0">
+                <a:solidFill>
+                  <a:srgbClr val="FF6018"/>
+                </a:solidFill>
+              </a:rPr>
+              <a:t>Do I care about the </a:t>
+            </a:r>
+            <a:r>
+              <a:rPr lang="en-US" b="1" u="sng" dirty="0">
+                <a:solidFill>
+                  <a:srgbClr val="FF6018"/>
+                </a:solidFill>
+              </a:rPr>
+              <a:t>trend</a:t>
+            </a:r>
+            <a:r>
+              <a:rPr lang="en-US" b="1" dirty="0">
+                <a:solidFill>
+                  <a:srgbClr val="FF6018"/>
+                </a:solidFill>
+              </a:rPr>
+              <a:t>?</a:t>
+            </a:r>
+          </a:p>
+        </p:txBody>
+      </p:sp>
+      <p:cxnSp>
+        <p:nvCxnSpPr>
+          <p:cNvPr id="25" name="Curved Connector 24">
+            <a:extLst>
+              <a:ext uri="{FF2B5EF4-FFF2-40B4-BE49-F238E27FC236}">
+                <a16:creationId xmlns:a16="http://schemas.microsoft.com/office/drawing/2014/main" id="{2A54BB5C-4A7E-A156-BA70-797186A47822}"/>
+              </a:ext>
+            </a:extLst>
+          </p:cNvPr>
+          <p:cNvCxnSpPr>
+            <a:cxnSpLocks/>
+            <a:stCxn id="24" idx="2"/>
+            <a:endCxn id="16" idx="0"/>
+          </p:cNvCxnSpPr>
+          <p:nvPr/>
+        </p:nvCxnSpPr>
+        <p:spPr>
+          <a:xfrm rot="16200000" flipH="1">
+            <a:off x="9506672" y="3405968"/>
+            <a:ext cx="1460014" cy="1392382"/>
+          </a:xfrm>
+          <a:prstGeom prst="curvedConnector3">
+            <a:avLst>
+              <a:gd name="adj1" fmla="val 50000"/>
+            </a:avLst>
+          </a:prstGeom>
+          <a:ln w="38100">
+            <a:solidFill>
+              <a:srgbClr val="FFB02F"/>
+            </a:solidFill>
+            <a:tailEnd type="triangle"/>
+          </a:ln>
+        </p:spPr>
+        <p:style>
+          <a:lnRef idx="1">
+            <a:schemeClr val="accent1"/>
+          </a:lnRef>
+          <a:fillRef idx="0">
+            <a:schemeClr val="accent1"/>
+          </a:fillRef>
+          <a:effectRef idx="0">
+            <a:schemeClr val="accent1"/>
+          </a:effectRef>
+          <a:fontRef idx="minor">
+            <a:schemeClr val="tx1"/>
+          </a:fontRef>
+        </p:style>
+      </p:cxnSp>
+      <p:cxnSp>
+        <p:nvCxnSpPr>
+          <p:cNvPr id="29" name="Curved Connector 28">
+            <a:extLst>
+              <a:ext uri="{FF2B5EF4-FFF2-40B4-BE49-F238E27FC236}">
+                <a16:creationId xmlns:a16="http://schemas.microsoft.com/office/drawing/2014/main" id="{8E29606C-DCE7-9608-4BF9-CFAF2BFDBF38}"/>
+              </a:ext>
+            </a:extLst>
+          </p:cNvPr>
+          <p:cNvCxnSpPr>
+            <a:cxnSpLocks/>
+            <a:stCxn id="24" idx="2"/>
+            <a:endCxn id="17" idx="0"/>
+          </p:cNvCxnSpPr>
+          <p:nvPr/>
+        </p:nvCxnSpPr>
+        <p:spPr>
+          <a:xfrm rot="5400000">
+            <a:off x="8114290" y="3405968"/>
+            <a:ext cx="1460014" cy="1392383"/>
+          </a:xfrm>
+          <a:prstGeom prst="curvedConnector3">
+            <a:avLst>
+              <a:gd name="adj1" fmla="val 50000"/>
+            </a:avLst>
+          </a:prstGeom>
+          <a:ln w="38100">
+            <a:solidFill>
+              <a:srgbClr val="DF227C"/>
+            </a:solidFill>
+            <a:tailEnd type="triangle"/>
+          </a:ln>
+        </p:spPr>
+        <p:style>
+          <a:lnRef idx="1">
+            <a:schemeClr val="accent1"/>
+          </a:lnRef>
+          <a:fillRef idx="0">
+            <a:schemeClr val="accent1"/>
+          </a:fillRef>
+          <a:effectRef idx="0">
+            <a:schemeClr val="accent1"/>
+          </a:effectRef>
+          <a:fontRef idx="minor">
+            <a:schemeClr val="tx1"/>
+          </a:fontRef>
+        </p:style>
+      </p:cxnSp>
+      <p:sp>
+        <p:nvSpPr>
+          <p:cNvPr id="40" name="TextBox 39">
+            <a:extLst>
+              <a:ext uri="{FF2B5EF4-FFF2-40B4-BE49-F238E27FC236}">
+                <a16:creationId xmlns:a16="http://schemas.microsoft.com/office/drawing/2014/main" id="{585419FA-3707-6724-C627-E714CA266776}"/>
+              </a:ext>
+            </a:extLst>
+          </p:cNvPr>
+          <p:cNvSpPr txBox="1"/>
+          <p:nvPr/>
+        </p:nvSpPr>
+        <p:spPr>
+          <a:xfrm>
+            <a:off x="7459681" y="1980880"/>
+            <a:ext cx="460382" cy="369332"/>
+          </a:xfrm>
+          <a:prstGeom prst="rect">
+            <a:avLst/>
+          </a:prstGeom>
+          <a:noFill/>
+        </p:spPr>
+        <p:txBody>
+          <a:bodyPr wrap="none" rtlCol="0">
+            <a:spAutoFit/>
+          </a:bodyPr>
+          <a:lstStyle/>
+          <a:p>
+            <a:r>
+              <a:rPr lang="en-US" b="1" dirty="0">
+                <a:solidFill>
+                  <a:srgbClr val="FFB02F"/>
+                </a:solidFill>
+              </a:rPr>
+              <a:t>No</a:t>
+            </a:r>
+          </a:p>
+        </p:txBody>
+      </p:sp>
+      <p:sp>
+        <p:nvSpPr>
+          <p:cNvPr id="41" name="TextBox 40">
+            <a:extLst>
+              <a:ext uri="{FF2B5EF4-FFF2-40B4-BE49-F238E27FC236}">
+                <a16:creationId xmlns:a16="http://schemas.microsoft.com/office/drawing/2014/main" id="{391B9660-A65D-BC5F-F64A-1CF0AD4D6FFC}"/>
+              </a:ext>
+            </a:extLst>
+          </p:cNvPr>
+          <p:cNvSpPr txBox="1"/>
+          <p:nvPr/>
+        </p:nvSpPr>
+        <p:spPr>
+          <a:xfrm>
+            <a:off x="10236679" y="3686082"/>
+            <a:ext cx="460382" cy="369332"/>
+          </a:xfrm>
+          <a:prstGeom prst="rect">
+            <a:avLst/>
+          </a:prstGeom>
+          <a:noFill/>
+        </p:spPr>
+        <p:txBody>
+          <a:bodyPr wrap="none" rtlCol="0">
+            <a:spAutoFit/>
+          </a:bodyPr>
+          <a:lstStyle/>
+          <a:p>
+            <a:r>
+              <a:rPr lang="en-US" b="1" dirty="0">
+                <a:solidFill>
+                  <a:srgbClr val="FFB02F"/>
+                </a:solidFill>
+              </a:rPr>
+              <a:t>No</a:t>
+            </a:r>
+          </a:p>
+        </p:txBody>
+      </p:sp>
+      <p:sp>
+        <p:nvSpPr>
+          <p:cNvPr id="42" name="TextBox 41">
+            <a:extLst>
+              <a:ext uri="{FF2B5EF4-FFF2-40B4-BE49-F238E27FC236}">
+                <a16:creationId xmlns:a16="http://schemas.microsoft.com/office/drawing/2014/main" id="{2D7D2F5F-FACA-7677-13ED-CE9990819839}"/>
+              </a:ext>
+            </a:extLst>
+          </p:cNvPr>
+          <p:cNvSpPr txBox="1"/>
+          <p:nvPr/>
+        </p:nvSpPr>
+        <p:spPr>
+          <a:xfrm>
+            <a:off x="8452575" y="3686082"/>
+            <a:ext cx="493212" cy="369332"/>
+          </a:xfrm>
+          <a:prstGeom prst="rect">
+            <a:avLst/>
+          </a:prstGeom>
+          <a:noFill/>
+        </p:spPr>
+        <p:txBody>
+          <a:bodyPr wrap="none" rtlCol="0">
+            <a:spAutoFit/>
+          </a:bodyPr>
+          <a:lstStyle/>
+          <a:p>
+            <a:r>
+              <a:rPr lang="en-US" b="1" dirty="0">
+                <a:solidFill>
+                  <a:srgbClr val="DF227C"/>
+                </a:solidFill>
+              </a:rPr>
+              <a:t>Yes</a:t>
+            </a:r>
+          </a:p>
+        </p:txBody>
+      </p:sp>
+      <p:sp>
+        <p:nvSpPr>
+          <p:cNvPr id="47" name="TextBox 46">
+            <a:extLst>
+              <a:ext uri="{FF2B5EF4-FFF2-40B4-BE49-F238E27FC236}">
+                <a16:creationId xmlns:a16="http://schemas.microsoft.com/office/drawing/2014/main" id="{58435BAC-DFA2-5040-C004-19E6B29797C2}"/>
+              </a:ext>
+            </a:extLst>
+          </p:cNvPr>
+          <p:cNvSpPr txBox="1"/>
+          <p:nvPr/>
+        </p:nvSpPr>
+        <p:spPr>
+          <a:xfrm>
+            <a:off x="4298675" y="1935529"/>
+            <a:ext cx="493212" cy="369332"/>
+          </a:xfrm>
+          <a:prstGeom prst="rect">
+            <a:avLst/>
+          </a:prstGeom>
+          <a:noFill/>
+        </p:spPr>
+        <p:txBody>
+          <a:bodyPr wrap="none" rtlCol="0">
+            <a:spAutoFit/>
+          </a:bodyPr>
+          <a:lstStyle/>
+          <a:p>
+            <a:r>
+              <a:rPr lang="en-US" b="1" dirty="0">
+                <a:solidFill>
+                  <a:srgbClr val="DF227C"/>
+                </a:solidFill>
+              </a:rPr>
+              <a:t>Yes</a:t>
+            </a:r>
+          </a:p>
+        </p:txBody>
+      </p:sp>
+      <p:cxnSp>
+        <p:nvCxnSpPr>
+          <p:cNvPr id="61" name="Curved Connector 60">
+            <a:extLst>
+              <a:ext uri="{FF2B5EF4-FFF2-40B4-BE49-F238E27FC236}">
+                <a16:creationId xmlns:a16="http://schemas.microsoft.com/office/drawing/2014/main" id="{CCCAC08A-1CE3-CCBB-7F3C-AAAA7ADDCE6A}"/>
+              </a:ext>
+            </a:extLst>
+          </p:cNvPr>
+          <p:cNvCxnSpPr>
+            <a:cxnSpLocks/>
+            <a:stCxn id="15" idx="2"/>
+            <a:endCxn id="67" idx="0"/>
+          </p:cNvCxnSpPr>
+          <p:nvPr/>
+        </p:nvCxnSpPr>
+        <p:spPr>
+          <a:xfrm rot="16200000" flipH="1">
+            <a:off x="3012148" y="3470428"/>
+            <a:ext cx="1331093" cy="1392382"/>
+          </a:xfrm>
+          <a:prstGeom prst="curvedConnector3">
+            <a:avLst>
+              <a:gd name="adj1" fmla="val 50000"/>
+            </a:avLst>
+          </a:prstGeom>
+          <a:ln w="38100">
+            <a:solidFill>
+              <a:srgbClr val="FFB02F"/>
+            </a:solidFill>
+            <a:tailEnd type="triangle"/>
+          </a:ln>
+        </p:spPr>
+        <p:style>
+          <a:lnRef idx="1">
+            <a:schemeClr val="accent1"/>
+          </a:lnRef>
+          <a:fillRef idx="0">
+            <a:schemeClr val="accent1"/>
+          </a:fillRef>
+          <a:effectRef idx="0">
+            <a:schemeClr val="accent1"/>
+          </a:effectRef>
+          <a:fontRef idx="minor">
+            <a:schemeClr val="tx1"/>
+          </a:fontRef>
+        </p:style>
+      </p:cxnSp>
+      <p:cxnSp>
+        <p:nvCxnSpPr>
+          <p:cNvPr id="62" name="Curved Connector 61">
+            <a:extLst>
+              <a:ext uri="{FF2B5EF4-FFF2-40B4-BE49-F238E27FC236}">
+                <a16:creationId xmlns:a16="http://schemas.microsoft.com/office/drawing/2014/main" id="{6B3D6EDD-555D-51FE-8482-06062D57A522}"/>
+              </a:ext>
+            </a:extLst>
+          </p:cNvPr>
+          <p:cNvCxnSpPr>
+            <a:cxnSpLocks/>
+            <a:stCxn id="15" idx="2"/>
+            <a:endCxn id="68" idx="0"/>
+          </p:cNvCxnSpPr>
+          <p:nvPr/>
+        </p:nvCxnSpPr>
+        <p:spPr>
+          <a:xfrm rot="5400000">
+            <a:off x="1619766" y="3470428"/>
+            <a:ext cx="1331093" cy="1392383"/>
+          </a:xfrm>
+          <a:prstGeom prst="curvedConnector3">
+            <a:avLst>
+              <a:gd name="adj1" fmla="val 50000"/>
+            </a:avLst>
+          </a:prstGeom>
+          <a:ln w="38100">
+            <a:solidFill>
+              <a:srgbClr val="DF227C"/>
+            </a:solidFill>
+            <a:tailEnd type="triangle"/>
+          </a:ln>
+        </p:spPr>
+        <p:style>
+          <a:lnRef idx="1">
+            <a:schemeClr val="accent1"/>
+          </a:lnRef>
+          <a:fillRef idx="0">
+            <a:schemeClr val="accent1"/>
+          </a:fillRef>
+          <a:effectRef idx="0">
+            <a:schemeClr val="accent1"/>
+          </a:effectRef>
+          <a:fontRef idx="minor">
+            <a:schemeClr val="tx1"/>
+          </a:fontRef>
+        </p:style>
+      </p:cxnSp>
+      <p:sp>
+        <p:nvSpPr>
+          <p:cNvPr id="63" name="TextBox 62">
+            <a:extLst>
+              <a:ext uri="{FF2B5EF4-FFF2-40B4-BE49-F238E27FC236}">
+                <a16:creationId xmlns:a16="http://schemas.microsoft.com/office/drawing/2014/main" id="{F85DA50F-4E26-C7F6-8E4D-684811FA6E8A}"/>
+              </a:ext>
+            </a:extLst>
+          </p:cNvPr>
+          <p:cNvSpPr txBox="1"/>
+          <p:nvPr/>
+        </p:nvSpPr>
+        <p:spPr>
+          <a:xfrm>
+            <a:off x="3606044" y="3797287"/>
+            <a:ext cx="460382" cy="369332"/>
+          </a:xfrm>
+          <a:prstGeom prst="rect">
+            <a:avLst/>
+          </a:prstGeom>
+          <a:noFill/>
+        </p:spPr>
+        <p:txBody>
+          <a:bodyPr wrap="none" rtlCol="0">
+            <a:spAutoFit/>
+          </a:bodyPr>
+          <a:lstStyle/>
+          <a:p>
+            <a:r>
+              <a:rPr lang="en-US" b="1" dirty="0">
+                <a:solidFill>
+                  <a:srgbClr val="FFB02F"/>
+                </a:solidFill>
+              </a:rPr>
+              <a:t>No</a:t>
+            </a:r>
+          </a:p>
+        </p:txBody>
+      </p:sp>
+      <p:sp>
+        <p:nvSpPr>
+          <p:cNvPr id="64" name="TextBox 63">
+            <a:extLst>
+              <a:ext uri="{FF2B5EF4-FFF2-40B4-BE49-F238E27FC236}">
+                <a16:creationId xmlns:a16="http://schemas.microsoft.com/office/drawing/2014/main" id="{894BD7C3-7553-F066-21FE-32C08EF3C645}"/>
+              </a:ext>
+            </a:extLst>
+          </p:cNvPr>
+          <p:cNvSpPr txBox="1"/>
+          <p:nvPr/>
+        </p:nvSpPr>
+        <p:spPr>
+          <a:xfrm>
+            <a:off x="1932730" y="3797287"/>
+            <a:ext cx="493212" cy="369332"/>
+          </a:xfrm>
+          <a:prstGeom prst="rect">
+            <a:avLst/>
+          </a:prstGeom>
+          <a:noFill/>
+        </p:spPr>
+        <p:txBody>
+          <a:bodyPr wrap="none" rtlCol="0">
+            <a:spAutoFit/>
+          </a:bodyPr>
+          <a:lstStyle/>
+          <a:p>
+            <a:r>
+              <a:rPr lang="en-US" b="1" dirty="0">
+                <a:solidFill>
+                  <a:srgbClr val="DF227C"/>
+                </a:solidFill>
+              </a:rPr>
+              <a:t>Yes</a:t>
+            </a:r>
+          </a:p>
+        </p:txBody>
+      </p:sp>
+      <p:sp>
+        <p:nvSpPr>
+          <p:cNvPr id="67" name="Rounded Rectangle 66">
+            <a:extLst>
+              <a:ext uri="{FF2B5EF4-FFF2-40B4-BE49-F238E27FC236}">
+                <a16:creationId xmlns:a16="http://schemas.microsoft.com/office/drawing/2014/main" id="{D3879DB1-05FA-18AF-2DCE-745FD8BC5AA0}"/>
+              </a:ext>
+            </a:extLst>
+          </p:cNvPr>
+          <p:cNvSpPr/>
+          <p:nvPr/>
+        </p:nvSpPr>
+        <p:spPr>
+          <a:xfrm>
+            <a:off x="3420253" y="4832166"/>
+            <a:ext cx="1907264" cy="576574"/>
+          </a:xfrm>
+          <a:prstGeom prst="roundRect">
+            <a:avLst/>
+          </a:prstGeom>
+          <a:solidFill>
+            <a:srgbClr val="725EEC"/>
+          </a:solidFill>
+          <a:ln>
+            <a:solidFill>
+              <a:srgbClr val="222222"/>
+            </a:solidFill>
+          </a:ln>
+        </p:spPr>
+        <p:style>
+          <a:lnRef idx="2">
+            <a:schemeClr val="accent1">
+              <a:shade val="15000"/>
+            </a:schemeClr>
+          </a:lnRef>
+          <a:fillRef idx="1">
+            <a:schemeClr val="accent1"/>
+          </a:fillRef>
+          <a:effectRef idx="0">
+            <a:schemeClr val="accent1"/>
+          </a:effectRef>
+          <a:fontRef idx="minor">
+            <a:schemeClr val="lt1"/>
+          </a:fontRef>
+        </p:style>
+        <p:txBody>
+          <a:bodyPr rtlCol="0" anchor="ctr"/>
+          <a:lstStyle/>
+          <a:p>
+            <a:pPr algn="ctr"/>
+            <a:r>
+              <a:rPr lang="en-US" sz="2800" b="1" dirty="0">
+                <a:solidFill>
+                  <a:srgbClr val="222222"/>
+                </a:solidFill>
+              </a:rPr>
+              <a:t>Bar Graph</a:t>
+            </a:r>
+          </a:p>
+        </p:txBody>
+      </p:sp>
+      <p:sp>
+        <p:nvSpPr>
+          <p:cNvPr id="68" name="Rounded Rectangle 67">
+            <a:extLst>
+              <a:ext uri="{FF2B5EF4-FFF2-40B4-BE49-F238E27FC236}">
+                <a16:creationId xmlns:a16="http://schemas.microsoft.com/office/drawing/2014/main" id="{4B9111BC-80DF-E5B3-ECDB-E89D453C327C}"/>
+              </a:ext>
+            </a:extLst>
+          </p:cNvPr>
+          <p:cNvSpPr/>
+          <p:nvPr/>
+        </p:nvSpPr>
+        <p:spPr>
+          <a:xfrm>
+            <a:off x="635488" y="4832166"/>
+            <a:ext cx="1907264" cy="576574"/>
+          </a:xfrm>
+          <a:prstGeom prst="roundRect">
+            <a:avLst/>
+          </a:prstGeom>
+          <a:solidFill>
+            <a:srgbClr val="725EEC"/>
+          </a:solidFill>
+          <a:ln>
+            <a:solidFill>
+              <a:srgbClr val="222222"/>
+            </a:solidFill>
+          </a:ln>
+        </p:spPr>
+        <p:style>
+          <a:lnRef idx="2">
+            <a:schemeClr val="accent1">
+              <a:shade val="15000"/>
+            </a:schemeClr>
+          </a:lnRef>
+          <a:fillRef idx="1">
+            <a:schemeClr val="accent1"/>
+          </a:fillRef>
+          <a:effectRef idx="0">
+            <a:schemeClr val="accent1"/>
+          </a:effectRef>
+          <a:fontRef idx="minor">
+            <a:schemeClr val="lt1"/>
+          </a:fontRef>
+        </p:style>
+        <p:txBody>
+          <a:bodyPr rtlCol="0" anchor="ctr"/>
+          <a:lstStyle/>
+          <a:p>
+            <a:pPr algn="ctr"/>
+            <a:r>
+              <a:rPr lang="en-US" sz="2000" b="1" dirty="0">
+                <a:solidFill>
+                  <a:srgbClr val="222222"/>
+                </a:solidFill>
+              </a:rPr>
+              <a:t>Boxplot / </a:t>
+            </a:r>
+          </a:p>
+          <a:p>
+            <a:pPr algn="ctr"/>
+            <a:r>
+              <a:rPr lang="en-US" sz="2000" b="1" dirty="0">
+                <a:solidFill>
+                  <a:srgbClr val="222222"/>
+                </a:solidFill>
+              </a:rPr>
+              <a:t>Violin Plot</a:t>
+            </a:r>
+          </a:p>
+        </p:txBody>
+      </p:sp>
+    </p:spTree>
+    <p:extLst>
+      <p:ext uri="{BB962C8B-B14F-4D97-AF65-F5344CB8AC3E}">
+        <p14:creationId xmlns:p14="http://schemas.microsoft.com/office/powerpoint/2010/main" val="490893553"/>
+      </p:ext>
+    </p:extLst>
+  </p:cSld>
+  <p:clrMapOvr>
+    <a:masterClrMapping/>
+  </p:clrMapOvr>
+</p:sld>
+</file>
+
+<file path=ppt/slides/slide7.xml><?xml version="1.0" encoding="utf-8"?>
+<p:sld xmlns:a="http://schemas.openxmlformats.org/drawingml/2006/main" xmlns:r="http://schemas.openxmlformats.org/officeDocument/2006/relationships" xmlns:p="http://schemas.openxmlformats.org/presentationml/2006/main">
+  <p:cSld>
+    <p:spTree>
+      <p:nvGrpSpPr>
+        <p:cNvPr id="1" name="">
+          <a:extLst>
+            <a:ext uri="{FF2B5EF4-FFF2-40B4-BE49-F238E27FC236}">
+              <a16:creationId xmlns:a16="http://schemas.microsoft.com/office/drawing/2014/main" id="{649BF671-D839-422D-0BA1-2B6291480AA5}"/>
+            </a:ext>
+          </a:extLst>
+        </p:cNvPr>
+        <p:cNvGrpSpPr/>
+        <p:nvPr/>
+      </p:nvGrpSpPr>
+      <p:grpSpPr>
+        <a:xfrm>
+          <a:off x="0" y="0"/>
+          <a:ext cx="0" cy="0"/>
+          <a:chOff x="0" y="0"/>
+          <a:chExt cx="0" cy="0"/>
+        </a:xfrm>
+      </p:grpSpPr>
+      <p:sp>
+        <p:nvSpPr>
+          <p:cNvPr id="3" name="Title 1">
+            <a:extLst>
+              <a:ext uri="{FF2B5EF4-FFF2-40B4-BE49-F238E27FC236}">
+                <a16:creationId xmlns:a16="http://schemas.microsoft.com/office/drawing/2014/main" id="{B35222DF-3392-712E-710F-28C7AF8F6A4D}"/>
+              </a:ext>
+            </a:extLst>
+          </p:cNvPr>
+          <p:cNvSpPr txBox="1">
+            <a:spLocks/>
+          </p:cNvSpPr>
+          <p:nvPr/>
+        </p:nvSpPr>
+        <p:spPr>
+          <a:xfrm>
+            <a:off x="0" y="0"/>
+            <a:ext cx="3323063" cy="373232"/>
+          </a:xfrm>
+          <a:prstGeom prst="rect">
+            <a:avLst/>
+          </a:prstGeom>
+          <a:solidFill>
+            <a:srgbClr val="725EEC"/>
+          </a:solidFill>
+        </p:spPr>
+        <p:txBody>
+          <a:bodyPr vert="horz" lIns="91440" tIns="45720" rIns="91440" bIns="45720" rtlCol="0" anchor="ctr">
+            <a:noAutofit/>
+          </a:bodyPr>
+          <a:lstStyle>
+            <a:lvl1pPr algn="ctr" defTabSz="914400" rtl="0" eaLnBrk="1" latinLnBrk="0" hangingPunct="1">
+              <a:lnSpc>
+                <a:spcPct val="90000"/>
+              </a:lnSpc>
+              <a:spcBef>
+                <a:spcPct val="0"/>
+              </a:spcBef>
+              <a:buNone/>
+              <a:defRPr sz="6000" kern="1200">
+                <a:solidFill>
+                  <a:schemeClr val="tx1"/>
+                </a:solidFill>
+                <a:latin typeface="+mj-lt"/>
+                <a:ea typeface="+mj-ea"/>
+                <a:cs typeface="+mj-cs"/>
+              </a:defRPr>
+            </a:lvl1pPr>
+          </a:lstStyle>
+          <a:p>
+            <a:pPr algn="l"/>
+            <a:r>
+              <a:rPr lang="en-US" sz="1800" dirty="0">
+                <a:solidFill>
+                  <a:schemeClr val="bg1"/>
+                </a:solidFill>
+                <a:latin typeface="+mn-lt"/>
+                <a:cs typeface="Arial" panose="020B0604020202020204" pitchFamily="34" charset="0"/>
+              </a:rPr>
+              <a:t>viz-roadmap-04.png</a:t>
+            </a:r>
+          </a:p>
+        </p:txBody>
+      </p:sp>
+      <p:sp>
+        <p:nvSpPr>
+          <p:cNvPr id="14" name="Rounded Rectangle 13">
+            <a:extLst>
+              <a:ext uri="{FF2B5EF4-FFF2-40B4-BE49-F238E27FC236}">
+                <a16:creationId xmlns:a16="http://schemas.microsoft.com/office/drawing/2014/main" id="{AA1C6413-062E-5C7C-00BE-691957440529}"/>
+              </a:ext>
+            </a:extLst>
+          </p:cNvPr>
+          <p:cNvSpPr/>
+          <p:nvPr/>
+        </p:nvSpPr>
+        <p:spPr>
+          <a:xfrm>
+            <a:off x="3781573" y="1336962"/>
+            <a:ext cx="4441816" cy="467591"/>
+          </a:xfrm>
+          <a:prstGeom prst="roundRect">
+            <a:avLst/>
+          </a:prstGeom>
+          <a:solidFill>
+            <a:srgbClr val="FF6018"/>
+          </a:solidFill>
+          <a:ln>
+            <a:solidFill>
+              <a:srgbClr val="222222"/>
+            </a:solidFill>
+          </a:ln>
+        </p:spPr>
+        <p:style>
+          <a:lnRef idx="2">
+            <a:schemeClr val="accent1">
+              <a:shade val="15000"/>
+            </a:schemeClr>
+          </a:lnRef>
+          <a:fillRef idx="1">
+            <a:schemeClr val="accent1"/>
+          </a:fillRef>
+          <a:effectRef idx="0">
+            <a:schemeClr val="accent1"/>
+          </a:effectRef>
+          <a:fontRef idx="minor">
+            <a:schemeClr val="lt1"/>
+          </a:fontRef>
+        </p:style>
+        <p:txBody>
+          <a:bodyPr rtlCol="0" anchor="ctr"/>
+          <a:lstStyle/>
+          <a:p>
+            <a:pPr algn="ctr"/>
+            <a:r>
+              <a:rPr lang="en-US" b="1" dirty="0">
+                <a:solidFill>
+                  <a:srgbClr val="222222"/>
+                </a:solidFill>
+              </a:rPr>
+              <a:t>Is my </a:t>
+            </a:r>
+            <a:r>
+              <a:rPr lang="en-US" b="1" u="sng" dirty="0">
+                <a:solidFill>
+                  <a:srgbClr val="222222"/>
+                </a:solidFill>
+              </a:rPr>
+              <a:t>explanatory</a:t>
+            </a:r>
+            <a:r>
+              <a:rPr lang="en-US" b="1" dirty="0">
+                <a:solidFill>
+                  <a:srgbClr val="222222"/>
+                </a:solidFill>
+              </a:rPr>
+              <a:t> variable categorical?</a:t>
+            </a:r>
+          </a:p>
+        </p:txBody>
+      </p:sp>
+      <p:sp>
+        <p:nvSpPr>
+          <p:cNvPr id="15" name="Rounded Rectangle 14">
+            <a:extLst>
+              <a:ext uri="{FF2B5EF4-FFF2-40B4-BE49-F238E27FC236}">
+                <a16:creationId xmlns:a16="http://schemas.microsoft.com/office/drawing/2014/main" id="{9AD4D0AF-D731-8AC3-F8E5-E4237420E0F0}"/>
+              </a:ext>
+            </a:extLst>
+          </p:cNvPr>
+          <p:cNvSpPr/>
+          <p:nvPr/>
+        </p:nvSpPr>
+        <p:spPr>
+          <a:xfrm>
+            <a:off x="1589120" y="2744636"/>
+            <a:ext cx="2784765" cy="756437"/>
+          </a:xfrm>
+          <a:prstGeom prst="roundRect">
+            <a:avLst/>
+          </a:prstGeom>
+          <a:solidFill>
+            <a:srgbClr val="FF6018"/>
+          </a:solidFill>
+          <a:ln>
+            <a:solidFill>
+              <a:srgbClr val="222222"/>
+            </a:solidFill>
+          </a:ln>
+        </p:spPr>
+        <p:style>
+          <a:lnRef idx="2">
+            <a:schemeClr val="accent1">
+              <a:shade val="15000"/>
+            </a:schemeClr>
+          </a:lnRef>
+          <a:fillRef idx="1">
+            <a:schemeClr val="accent1"/>
+          </a:fillRef>
+          <a:effectRef idx="0">
+            <a:schemeClr val="accent1"/>
+          </a:effectRef>
+          <a:fontRef idx="minor">
+            <a:schemeClr val="lt1"/>
+          </a:fontRef>
+        </p:style>
+        <p:txBody>
+          <a:bodyPr rtlCol="0" anchor="ctr"/>
+          <a:lstStyle/>
+          <a:p>
+            <a:pPr algn="ctr"/>
+            <a:r>
+              <a:rPr lang="en-US" b="1" dirty="0">
+                <a:solidFill>
+                  <a:srgbClr val="222222"/>
+                </a:solidFill>
+              </a:rPr>
+              <a:t>Is the </a:t>
+            </a:r>
+            <a:r>
+              <a:rPr lang="en-US" b="1" u="sng" dirty="0">
+                <a:solidFill>
+                  <a:srgbClr val="222222"/>
+                </a:solidFill>
+              </a:rPr>
+              <a:t>range</a:t>
+            </a:r>
+            <a:r>
+              <a:rPr lang="en-US" b="1" dirty="0">
+                <a:solidFill>
+                  <a:srgbClr val="222222"/>
+                </a:solidFill>
+              </a:rPr>
+              <a:t> of the data what’s important?</a:t>
+            </a:r>
+          </a:p>
+        </p:txBody>
+      </p:sp>
+      <p:sp>
+        <p:nvSpPr>
+          <p:cNvPr id="16" name="Rounded Rectangle 15">
+            <a:extLst>
+              <a:ext uri="{FF2B5EF4-FFF2-40B4-BE49-F238E27FC236}">
+                <a16:creationId xmlns:a16="http://schemas.microsoft.com/office/drawing/2014/main" id="{A39F5C87-D56E-A795-8F57-E087F51C6553}"/>
+              </a:ext>
+            </a:extLst>
+          </p:cNvPr>
+          <p:cNvSpPr/>
+          <p:nvPr/>
+        </p:nvSpPr>
+        <p:spPr>
+          <a:xfrm>
+            <a:off x="9979238" y="4832166"/>
+            <a:ext cx="1907264" cy="576574"/>
+          </a:xfrm>
+          <a:prstGeom prst="roundRect">
+            <a:avLst/>
+          </a:prstGeom>
+          <a:solidFill>
+            <a:srgbClr val="725EEC"/>
+          </a:solidFill>
+          <a:ln>
+            <a:solidFill>
+              <a:srgbClr val="222222"/>
+            </a:solidFill>
+          </a:ln>
+        </p:spPr>
+        <p:style>
+          <a:lnRef idx="2">
+            <a:schemeClr val="accent1">
+              <a:shade val="15000"/>
+            </a:schemeClr>
+          </a:lnRef>
+          <a:fillRef idx="1">
+            <a:schemeClr val="accent1"/>
+          </a:fillRef>
+          <a:effectRef idx="0">
+            <a:schemeClr val="accent1"/>
+          </a:effectRef>
+          <a:fontRef idx="minor">
+            <a:schemeClr val="lt1"/>
+          </a:fontRef>
+        </p:style>
+        <p:txBody>
+          <a:bodyPr rtlCol="0" anchor="ctr"/>
+          <a:lstStyle/>
+          <a:p>
+            <a:pPr algn="ctr"/>
+            <a:r>
+              <a:rPr lang="en-US" sz="2800" b="1" dirty="0">
+                <a:solidFill>
+                  <a:srgbClr val="725EEC"/>
+                </a:solidFill>
+              </a:rPr>
+              <a:t>Scatterplot</a:t>
+            </a:r>
+          </a:p>
+        </p:txBody>
+      </p:sp>
+      <p:sp>
+        <p:nvSpPr>
+          <p:cNvPr id="17" name="Rounded Rectangle 16">
+            <a:extLst>
+              <a:ext uri="{FF2B5EF4-FFF2-40B4-BE49-F238E27FC236}">
+                <a16:creationId xmlns:a16="http://schemas.microsoft.com/office/drawing/2014/main" id="{AE310AB4-46DB-248F-C314-F02B7C97A6D7}"/>
+              </a:ext>
+            </a:extLst>
+          </p:cNvPr>
+          <p:cNvSpPr/>
+          <p:nvPr/>
+        </p:nvSpPr>
+        <p:spPr>
+          <a:xfrm>
+            <a:off x="7194473" y="4832166"/>
+            <a:ext cx="1907264" cy="576574"/>
+          </a:xfrm>
+          <a:prstGeom prst="roundRect">
+            <a:avLst/>
+          </a:prstGeom>
+          <a:solidFill>
+            <a:srgbClr val="725EEC"/>
+          </a:solidFill>
+          <a:ln>
+            <a:solidFill>
+              <a:srgbClr val="222222"/>
+            </a:solidFill>
+          </a:ln>
+        </p:spPr>
+        <p:style>
+          <a:lnRef idx="2">
+            <a:schemeClr val="accent1">
+              <a:shade val="15000"/>
+            </a:schemeClr>
+          </a:lnRef>
+          <a:fillRef idx="1">
+            <a:schemeClr val="accent1"/>
+          </a:fillRef>
+          <a:effectRef idx="0">
+            <a:schemeClr val="accent1"/>
+          </a:effectRef>
+          <a:fontRef idx="minor">
+            <a:schemeClr val="lt1"/>
+          </a:fontRef>
+        </p:style>
+        <p:txBody>
+          <a:bodyPr rtlCol="0" anchor="ctr"/>
+          <a:lstStyle/>
+          <a:p>
+            <a:pPr algn="ctr"/>
+            <a:r>
+              <a:rPr lang="en-US" sz="2000" b="1" dirty="0">
+                <a:solidFill>
+                  <a:srgbClr val="725EEC"/>
+                </a:solidFill>
+              </a:rPr>
+              <a:t>Scatterplot + ”Best Fit” Line</a:t>
+            </a:r>
+          </a:p>
+        </p:txBody>
+      </p:sp>
+      <p:cxnSp>
+        <p:nvCxnSpPr>
+          <p:cNvPr id="20" name="Curved Connector 19">
+            <a:extLst>
+              <a:ext uri="{FF2B5EF4-FFF2-40B4-BE49-F238E27FC236}">
+                <a16:creationId xmlns:a16="http://schemas.microsoft.com/office/drawing/2014/main" id="{1687DCD4-CF6E-2ED5-B2C0-F06A9FB6E4AD}"/>
+              </a:ext>
+            </a:extLst>
+          </p:cNvPr>
+          <p:cNvCxnSpPr>
+            <a:cxnSpLocks/>
+            <a:stCxn id="14" idx="2"/>
+            <a:endCxn id="24" idx="0"/>
+          </p:cNvCxnSpPr>
+          <p:nvPr/>
+        </p:nvCxnSpPr>
+        <p:spPr>
+          <a:xfrm rot="16200000" flipH="1">
+            <a:off x="7236983" y="570050"/>
+            <a:ext cx="1069003" cy="3538007"/>
+          </a:xfrm>
+          <a:prstGeom prst="curvedConnector3">
+            <a:avLst>
+              <a:gd name="adj1" fmla="val 50000"/>
+            </a:avLst>
+          </a:prstGeom>
+          <a:ln w="38100">
+            <a:solidFill>
+              <a:srgbClr val="FFB02F"/>
+            </a:solidFill>
+            <a:tailEnd type="triangle"/>
+          </a:ln>
+        </p:spPr>
+        <p:style>
+          <a:lnRef idx="1">
+            <a:schemeClr val="accent1"/>
+          </a:lnRef>
+          <a:fillRef idx="0">
+            <a:schemeClr val="accent1"/>
+          </a:fillRef>
+          <a:effectRef idx="0">
+            <a:schemeClr val="accent1"/>
+          </a:effectRef>
+          <a:fontRef idx="minor">
+            <a:schemeClr val="tx1"/>
+          </a:fontRef>
+        </p:style>
+      </p:cxnSp>
+      <p:cxnSp>
+        <p:nvCxnSpPr>
+          <p:cNvPr id="23" name="Curved Connector 22">
+            <a:extLst>
+              <a:ext uri="{FF2B5EF4-FFF2-40B4-BE49-F238E27FC236}">
+                <a16:creationId xmlns:a16="http://schemas.microsoft.com/office/drawing/2014/main" id="{3034D825-A8BD-E031-9250-9EE6B3EC3D0E}"/>
+              </a:ext>
+            </a:extLst>
+          </p:cNvPr>
+          <p:cNvCxnSpPr>
+            <a:cxnSpLocks/>
+            <a:stCxn id="14" idx="2"/>
+            <a:endCxn id="15" idx="0"/>
+          </p:cNvCxnSpPr>
+          <p:nvPr/>
+        </p:nvCxnSpPr>
+        <p:spPr>
+          <a:xfrm rot="5400000">
+            <a:off x="4021951" y="764105"/>
+            <a:ext cx="940083" cy="3020978"/>
+          </a:xfrm>
+          <a:prstGeom prst="curvedConnector3">
+            <a:avLst/>
+          </a:prstGeom>
+          <a:ln w="38100">
+            <a:solidFill>
+              <a:srgbClr val="DF227C"/>
+            </a:solidFill>
+            <a:tailEnd type="triangle"/>
+          </a:ln>
+        </p:spPr>
+        <p:style>
+          <a:lnRef idx="1">
+            <a:schemeClr val="accent1"/>
+          </a:lnRef>
+          <a:fillRef idx="0">
+            <a:schemeClr val="accent1"/>
+          </a:fillRef>
+          <a:effectRef idx="0">
+            <a:schemeClr val="accent1"/>
+          </a:effectRef>
+          <a:fontRef idx="minor">
+            <a:schemeClr val="tx1"/>
+          </a:fontRef>
+        </p:style>
+      </p:cxnSp>
+      <p:sp>
+        <p:nvSpPr>
+          <p:cNvPr id="24" name="Rounded Rectangle 23">
+            <a:extLst>
+              <a:ext uri="{FF2B5EF4-FFF2-40B4-BE49-F238E27FC236}">
+                <a16:creationId xmlns:a16="http://schemas.microsoft.com/office/drawing/2014/main" id="{7B9F2356-53E9-05FA-A96A-DA6801BAD127}"/>
+              </a:ext>
+            </a:extLst>
+          </p:cNvPr>
+          <p:cNvSpPr/>
+          <p:nvPr/>
+        </p:nvSpPr>
+        <p:spPr>
+          <a:xfrm>
+            <a:off x="8148105" y="2873556"/>
+            <a:ext cx="2784765" cy="498596"/>
+          </a:xfrm>
+          <a:prstGeom prst="roundRect">
+            <a:avLst/>
+          </a:prstGeom>
+          <a:solidFill>
+            <a:srgbClr val="FF6018"/>
+          </a:solidFill>
+          <a:ln>
+            <a:solidFill>
+              <a:srgbClr val="222222"/>
+            </a:solidFill>
+          </a:ln>
+        </p:spPr>
+        <p:style>
+          <a:lnRef idx="2">
+            <a:schemeClr val="accent1">
+              <a:shade val="15000"/>
+            </a:schemeClr>
+          </a:lnRef>
+          <a:fillRef idx="1">
+            <a:schemeClr val="accent1"/>
+          </a:fillRef>
+          <a:effectRef idx="0">
+            <a:schemeClr val="accent1"/>
+          </a:effectRef>
+          <a:fontRef idx="minor">
+            <a:schemeClr val="lt1"/>
+          </a:fontRef>
+        </p:style>
+        <p:txBody>
+          <a:bodyPr rtlCol="0" anchor="ctr"/>
+          <a:lstStyle/>
+          <a:p>
+            <a:pPr algn="ctr"/>
+            <a:r>
+              <a:rPr lang="en-US" b="1" dirty="0">
+                <a:solidFill>
+                  <a:srgbClr val="222222"/>
+                </a:solidFill>
+              </a:rPr>
+              <a:t>Do I care about the </a:t>
+            </a:r>
+            <a:r>
+              <a:rPr lang="en-US" b="1" u="sng" dirty="0">
+                <a:solidFill>
+                  <a:srgbClr val="222222"/>
+                </a:solidFill>
+              </a:rPr>
+              <a:t>trend</a:t>
+            </a:r>
+            <a:r>
+              <a:rPr lang="en-US" b="1" dirty="0">
+                <a:solidFill>
+                  <a:srgbClr val="222222"/>
+                </a:solidFill>
+              </a:rPr>
+              <a:t>?</a:t>
+            </a:r>
+          </a:p>
+        </p:txBody>
+      </p:sp>
+      <p:cxnSp>
+        <p:nvCxnSpPr>
+          <p:cNvPr id="25" name="Curved Connector 24">
+            <a:extLst>
+              <a:ext uri="{FF2B5EF4-FFF2-40B4-BE49-F238E27FC236}">
+                <a16:creationId xmlns:a16="http://schemas.microsoft.com/office/drawing/2014/main" id="{56672001-8311-C58F-271E-833816D5528D}"/>
+              </a:ext>
+            </a:extLst>
+          </p:cNvPr>
+          <p:cNvCxnSpPr>
+            <a:cxnSpLocks/>
+            <a:stCxn id="24" idx="2"/>
+            <a:endCxn id="16" idx="0"/>
+          </p:cNvCxnSpPr>
+          <p:nvPr/>
+        </p:nvCxnSpPr>
+        <p:spPr>
+          <a:xfrm rot="16200000" flipH="1">
+            <a:off x="9506672" y="3405968"/>
+            <a:ext cx="1460014" cy="1392382"/>
+          </a:xfrm>
+          <a:prstGeom prst="curvedConnector3">
+            <a:avLst>
+              <a:gd name="adj1" fmla="val 50000"/>
+            </a:avLst>
+          </a:prstGeom>
+          <a:ln w="38100">
+            <a:solidFill>
+              <a:srgbClr val="FFB02F"/>
+            </a:solidFill>
+            <a:tailEnd type="triangle"/>
+          </a:ln>
+        </p:spPr>
+        <p:style>
+          <a:lnRef idx="1">
+            <a:schemeClr val="accent1"/>
+          </a:lnRef>
+          <a:fillRef idx="0">
+            <a:schemeClr val="accent1"/>
+          </a:fillRef>
+          <a:effectRef idx="0">
+            <a:schemeClr val="accent1"/>
+          </a:effectRef>
+          <a:fontRef idx="minor">
+            <a:schemeClr val="tx1"/>
+          </a:fontRef>
+        </p:style>
+      </p:cxnSp>
+      <p:cxnSp>
+        <p:nvCxnSpPr>
+          <p:cNvPr id="29" name="Curved Connector 28">
+            <a:extLst>
+              <a:ext uri="{FF2B5EF4-FFF2-40B4-BE49-F238E27FC236}">
+                <a16:creationId xmlns:a16="http://schemas.microsoft.com/office/drawing/2014/main" id="{60C71390-50C4-00F7-A54F-EC8D9327EC28}"/>
+              </a:ext>
+            </a:extLst>
+          </p:cNvPr>
+          <p:cNvCxnSpPr>
+            <a:cxnSpLocks/>
+            <a:stCxn id="24" idx="2"/>
+            <a:endCxn id="17" idx="0"/>
+          </p:cNvCxnSpPr>
+          <p:nvPr/>
+        </p:nvCxnSpPr>
+        <p:spPr>
+          <a:xfrm rot="5400000">
+            <a:off x="8114290" y="3405968"/>
+            <a:ext cx="1460014" cy="1392383"/>
+          </a:xfrm>
+          <a:prstGeom prst="curvedConnector3">
+            <a:avLst>
+              <a:gd name="adj1" fmla="val 50000"/>
+            </a:avLst>
+          </a:prstGeom>
+          <a:ln w="38100">
+            <a:solidFill>
+              <a:srgbClr val="DF227C"/>
+            </a:solidFill>
+            <a:tailEnd type="triangle"/>
+          </a:ln>
+        </p:spPr>
+        <p:style>
+          <a:lnRef idx="1">
+            <a:schemeClr val="accent1"/>
+          </a:lnRef>
+          <a:fillRef idx="0">
+            <a:schemeClr val="accent1"/>
+          </a:fillRef>
+          <a:effectRef idx="0">
+            <a:schemeClr val="accent1"/>
+          </a:effectRef>
+          <a:fontRef idx="minor">
+            <a:schemeClr val="tx1"/>
+          </a:fontRef>
+        </p:style>
+      </p:cxnSp>
+      <p:sp>
+        <p:nvSpPr>
+          <p:cNvPr id="40" name="TextBox 39">
+            <a:extLst>
+              <a:ext uri="{FF2B5EF4-FFF2-40B4-BE49-F238E27FC236}">
+                <a16:creationId xmlns:a16="http://schemas.microsoft.com/office/drawing/2014/main" id="{804839C0-37DB-F69E-2FF4-461AA04241C9}"/>
+              </a:ext>
+            </a:extLst>
+          </p:cNvPr>
+          <p:cNvSpPr txBox="1"/>
+          <p:nvPr/>
+        </p:nvSpPr>
+        <p:spPr>
+          <a:xfrm>
+            <a:off x="7459681" y="1980880"/>
+            <a:ext cx="460382" cy="369332"/>
+          </a:xfrm>
+          <a:prstGeom prst="rect">
+            <a:avLst/>
+          </a:prstGeom>
+          <a:noFill/>
+        </p:spPr>
+        <p:txBody>
+          <a:bodyPr wrap="none" rtlCol="0">
+            <a:spAutoFit/>
+          </a:bodyPr>
+          <a:lstStyle/>
+          <a:p>
+            <a:r>
+              <a:rPr lang="en-US" b="1" dirty="0">
+                <a:solidFill>
+                  <a:srgbClr val="FFB02F"/>
+                </a:solidFill>
+              </a:rPr>
+              <a:t>No</a:t>
+            </a:r>
+          </a:p>
+        </p:txBody>
+      </p:sp>
+      <p:sp>
+        <p:nvSpPr>
+          <p:cNvPr id="41" name="TextBox 40">
+            <a:extLst>
+              <a:ext uri="{FF2B5EF4-FFF2-40B4-BE49-F238E27FC236}">
+                <a16:creationId xmlns:a16="http://schemas.microsoft.com/office/drawing/2014/main" id="{FA818EE5-29CF-9046-907A-78B9AB9B3A7E}"/>
+              </a:ext>
+            </a:extLst>
+          </p:cNvPr>
+          <p:cNvSpPr txBox="1"/>
+          <p:nvPr/>
+        </p:nvSpPr>
+        <p:spPr>
+          <a:xfrm>
+            <a:off x="10236679" y="3686082"/>
+            <a:ext cx="460382" cy="369332"/>
+          </a:xfrm>
+          <a:prstGeom prst="rect">
+            <a:avLst/>
+          </a:prstGeom>
+          <a:noFill/>
+        </p:spPr>
+        <p:txBody>
+          <a:bodyPr wrap="none" rtlCol="0">
+            <a:spAutoFit/>
+          </a:bodyPr>
+          <a:lstStyle/>
+          <a:p>
+            <a:r>
+              <a:rPr lang="en-US" b="1" dirty="0">
+                <a:solidFill>
+                  <a:srgbClr val="FFB02F"/>
+                </a:solidFill>
+              </a:rPr>
+              <a:t>No</a:t>
+            </a:r>
+          </a:p>
+        </p:txBody>
+      </p:sp>
+      <p:sp>
+        <p:nvSpPr>
+          <p:cNvPr id="42" name="TextBox 41">
+            <a:extLst>
+              <a:ext uri="{FF2B5EF4-FFF2-40B4-BE49-F238E27FC236}">
+                <a16:creationId xmlns:a16="http://schemas.microsoft.com/office/drawing/2014/main" id="{CBD8AFD7-C8D8-4101-5E14-97ADEDC9C230}"/>
+              </a:ext>
+            </a:extLst>
+          </p:cNvPr>
+          <p:cNvSpPr txBox="1"/>
+          <p:nvPr/>
+        </p:nvSpPr>
+        <p:spPr>
+          <a:xfrm>
+            <a:off x="8452575" y="3686082"/>
+            <a:ext cx="493212" cy="369332"/>
+          </a:xfrm>
+          <a:prstGeom prst="rect">
+            <a:avLst/>
+          </a:prstGeom>
+          <a:noFill/>
+        </p:spPr>
+        <p:txBody>
+          <a:bodyPr wrap="none" rtlCol="0">
+            <a:spAutoFit/>
+          </a:bodyPr>
+          <a:lstStyle/>
+          <a:p>
+            <a:r>
+              <a:rPr lang="en-US" b="1" dirty="0">
+                <a:solidFill>
+                  <a:srgbClr val="DF227C"/>
+                </a:solidFill>
+              </a:rPr>
+              <a:t>Yes</a:t>
+            </a:r>
+          </a:p>
+        </p:txBody>
+      </p:sp>
+      <p:sp>
+        <p:nvSpPr>
+          <p:cNvPr id="47" name="TextBox 46">
+            <a:extLst>
+              <a:ext uri="{FF2B5EF4-FFF2-40B4-BE49-F238E27FC236}">
+                <a16:creationId xmlns:a16="http://schemas.microsoft.com/office/drawing/2014/main" id="{2A03E4EC-2A36-0D5D-945A-42E9AFE04B28}"/>
+              </a:ext>
+            </a:extLst>
+          </p:cNvPr>
+          <p:cNvSpPr txBox="1"/>
+          <p:nvPr/>
+        </p:nvSpPr>
+        <p:spPr>
+          <a:xfrm>
+            <a:off x="4298675" y="1935529"/>
+            <a:ext cx="493212" cy="369332"/>
+          </a:xfrm>
+          <a:prstGeom prst="rect">
+            <a:avLst/>
+          </a:prstGeom>
+          <a:noFill/>
+        </p:spPr>
+        <p:txBody>
+          <a:bodyPr wrap="none" rtlCol="0">
+            <a:spAutoFit/>
+          </a:bodyPr>
+          <a:lstStyle/>
+          <a:p>
+            <a:r>
+              <a:rPr lang="en-US" b="1" dirty="0">
+                <a:solidFill>
+                  <a:srgbClr val="DF227C"/>
+                </a:solidFill>
+              </a:rPr>
+              <a:t>Yes</a:t>
+            </a:r>
+          </a:p>
+        </p:txBody>
+      </p:sp>
+      <p:cxnSp>
+        <p:nvCxnSpPr>
+          <p:cNvPr id="61" name="Curved Connector 60">
+            <a:extLst>
+              <a:ext uri="{FF2B5EF4-FFF2-40B4-BE49-F238E27FC236}">
+                <a16:creationId xmlns:a16="http://schemas.microsoft.com/office/drawing/2014/main" id="{20F9DC28-22CE-3E9B-FC79-B093537175A8}"/>
+              </a:ext>
+            </a:extLst>
+          </p:cNvPr>
+          <p:cNvCxnSpPr>
+            <a:cxnSpLocks/>
+            <a:stCxn id="15" idx="2"/>
+            <a:endCxn id="67" idx="0"/>
+          </p:cNvCxnSpPr>
+          <p:nvPr/>
+        </p:nvCxnSpPr>
+        <p:spPr>
+          <a:xfrm rot="16200000" flipH="1">
+            <a:off x="3012148" y="3470428"/>
+            <a:ext cx="1331093" cy="1392382"/>
+          </a:xfrm>
+          <a:prstGeom prst="curvedConnector3">
+            <a:avLst>
+              <a:gd name="adj1" fmla="val 50000"/>
+            </a:avLst>
+          </a:prstGeom>
+          <a:ln w="38100">
+            <a:solidFill>
+              <a:srgbClr val="FFB02F"/>
+            </a:solidFill>
+            <a:tailEnd type="triangle"/>
+          </a:ln>
+        </p:spPr>
+        <p:style>
+          <a:lnRef idx="1">
+            <a:schemeClr val="accent1"/>
+          </a:lnRef>
+          <a:fillRef idx="0">
+            <a:schemeClr val="accent1"/>
+          </a:fillRef>
+          <a:effectRef idx="0">
+            <a:schemeClr val="accent1"/>
+          </a:effectRef>
+          <a:fontRef idx="minor">
+            <a:schemeClr val="tx1"/>
+          </a:fontRef>
+        </p:style>
+      </p:cxnSp>
+      <p:cxnSp>
+        <p:nvCxnSpPr>
+          <p:cNvPr id="62" name="Curved Connector 61">
+            <a:extLst>
+              <a:ext uri="{FF2B5EF4-FFF2-40B4-BE49-F238E27FC236}">
+                <a16:creationId xmlns:a16="http://schemas.microsoft.com/office/drawing/2014/main" id="{447A8DE0-D020-82E9-5700-51B26E9A8965}"/>
+              </a:ext>
+            </a:extLst>
+          </p:cNvPr>
+          <p:cNvCxnSpPr>
+            <a:cxnSpLocks/>
+            <a:stCxn id="15" idx="2"/>
+            <a:endCxn id="68" idx="0"/>
+          </p:cNvCxnSpPr>
+          <p:nvPr/>
+        </p:nvCxnSpPr>
+        <p:spPr>
+          <a:xfrm rot="5400000">
+            <a:off x="1619766" y="3470428"/>
+            <a:ext cx="1331093" cy="1392383"/>
+          </a:xfrm>
+          <a:prstGeom prst="curvedConnector3">
+            <a:avLst>
+              <a:gd name="adj1" fmla="val 50000"/>
+            </a:avLst>
+          </a:prstGeom>
+          <a:ln w="38100">
+            <a:solidFill>
+              <a:srgbClr val="DF227C"/>
+            </a:solidFill>
+            <a:tailEnd type="triangle"/>
+          </a:ln>
+        </p:spPr>
+        <p:style>
+          <a:lnRef idx="1">
+            <a:schemeClr val="accent1"/>
+          </a:lnRef>
+          <a:fillRef idx="0">
+            <a:schemeClr val="accent1"/>
+          </a:fillRef>
+          <a:effectRef idx="0">
+            <a:schemeClr val="accent1"/>
+          </a:effectRef>
+          <a:fontRef idx="minor">
+            <a:schemeClr val="tx1"/>
+          </a:fontRef>
+        </p:style>
+      </p:cxnSp>
+      <p:sp>
+        <p:nvSpPr>
+          <p:cNvPr id="63" name="TextBox 62">
+            <a:extLst>
+              <a:ext uri="{FF2B5EF4-FFF2-40B4-BE49-F238E27FC236}">
+                <a16:creationId xmlns:a16="http://schemas.microsoft.com/office/drawing/2014/main" id="{383C7D48-D87C-2AEF-E781-212FDB616FE3}"/>
+              </a:ext>
+            </a:extLst>
+          </p:cNvPr>
+          <p:cNvSpPr txBox="1"/>
+          <p:nvPr/>
+        </p:nvSpPr>
+        <p:spPr>
+          <a:xfrm>
+            <a:off x="3606044" y="3797287"/>
+            <a:ext cx="460382" cy="369332"/>
+          </a:xfrm>
+          <a:prstGeom prst="rect">
+            <a:avLst/>
+          </a:prstGeom>
+          <a:noFill/>
+        </p:spPr>
+        <p:txBody>
+          <a:bodyPr wrap="none" rtlCol="0">
+            <a:spAutoFit/>
+          </a:bodyPr>
+          <a:lstStyle/>
+          <a:p>
+            <a:r>
+              <a:rPr lang="en-US" b="1" dirty="0">
+                <a:solidFill>
+                  <a:srgbClr val="FFB02F"/>
+                </a:solidFill>
+              </a:rPr>
+              <a:t>No</a:t>
+            </a:r>
+          </a:p>
+        </p:txBody>
+      </p:sp>
+      <p:sp>
+        <p:nvSpPr>
+          <p:cNvPr id="64" name="TextBox 63">
+            <a:extLst>
+              <a:ext uri="{FF2B5EF4-FFF2-40B4-BE49-F238E27FC236}">
+                <a16:creationId xmlns:a16="http://schemas.microsoft.com/office/drawing/2014/main" id="{FE244A6E-251D-4BAE-7796-4A0FCD22B0F5}"/>
+              </a:ext>
+            </a:extLst>
+          </p:cNvPr>
+          <p:cNvSpPr txBox="1"/>
+          <p:nvPr/>
+        </p:nvSpPr>
+        <p:spPr>
+          <a:xfrm>
+            <a:off x="1932730" y="3797287"/>
+            <a:ext cx="493212" cy="369332"/>
+          </a:xfrm>
+          <a:prstGeom prst="rect">
+            <a:avLst/>
+          </a:prstGeom>
+          <a:noFill/>
+        </p:spPr>
+        <p:txBody>
+          <a:bodyPr wrap="none" rtlCol="0">
+            <a:spAutoFit/>
+          </a:bodyPr>
+          <a:lstStyle/>
+          <a:p>
+            <a:r>
+              <a:rPr lang="en-US" b="1" dirty="0">
+                <a:solidFill>
+                  <a:srgbClr val="DF227C"/>
+                </a:solidFill>
+              </a:rPr>
+              <a:t>Yes</a:t>
+            </a:r>
+          </a:p>
+        </p:txBody>
+      </p:sp>
+      <p:sp>
+        <p:nvSpPr>
+          <p:cNvPr id="67" name="Rounded Rectangle 66">
+            <a:extLst>
+              <a:ext uri="{FF2B5EF4-FFF2-40B4-BE49-F238E27FC236}">
+                <a16:creationId xmlns:a16="http://schemas.microsoft.com/office/drawing/2014/main" id="{85CD0B71-DF9C-7BB7-55F0-3D092EFE441C}"/>
+              </a:ext>
+            </a:extLst>
+          </p:cNvPr>
+          <p:cNvSpPr/>
+          <p:nvPr/>
+        </p:nvSpPr>
+        <p:spPr>
+          <a:xfrm>
+            <a:off x="3420253" y="4832166"/>
+            <a:ext cx="1907264" cy="576574"/>
+          </a:xfrm>
+          <a:prstGeom prst="roundRect">
+            <a:avLst/>
+          </a:prstGeom>
+          <a:solidFill>
+            <a:srgbClr val="725EEC"/>
+          </a:solidFill>
+          <a:ln>
+            <a:solidFill>
+              <a:srgbClr val="222222"/>
+            </a:solidFill>
+          </a:ln>
+        </p:spPr>
+        <p:style>
+          <a:lnRef idx="2">
+            <a:schemeClr val="accent1">
+              <a:shade val="15000"/>
+            </a:schemeClr>
+          </a:lnRef>
+          <a:fillRef idx="1">
+            <a:schemeClr val="accent1"/>
+          </a:fillRef>
+          <a:effectRef idx="0">
+            <a:schemeClr val="accent1"/>
+          </a:effectRef>
+          <a:fontRef idx="minor">
+            <a:schemeClr val="lt1"/>
+          </a:fontRef>
+        </p:style>
+        <p:txBody>
+          <a:bodyPr rtlCol="0" anchor="ctr"/>
+          <a:lstStyle/>
+          <a:p>
+            <a:pPr algn="ctr"/>
+            <a:r>
+              <a:rPr lang="en-US" sz="2800" b="1" dirty="0">
+                <a:solidFill>
+                  <a:srgbClr val="222222"/>
+                </a:solidFill>
+              </a:rPr>
+              <a:t>Bar Graph</a:t>
+            </a:r>
+          </a:p>
+        </p:txBody>
+      </p:sp>
+      <p:sp>
+        <p:nvSpPr>
+          <p:cNvPr id="68" name="Rounded Rectangle 67">
+            <a:extLst>
+              <a:ext uri="{FF2B5EF4-FFF2-40B4-BE49-F238E27FC236}">
+                <a16:creationId xmlns:a16="http://schemas.microsoft.com/office/drawing/2014/main" id="{5EFB42C3-DE59-585A-140E-437D3614AF06}"/>
+              </a:ext>
+            </a:extLst>
+          </p:cNvPr>
+          <p:cNvSpPr/>
+          <p:nvPr/>
+        </p:nvSpPr>
+        <p:spPr>
+          <a:xfrm>
+            <a:off x="635488" y="4832166"/>
+            <a:ext cx="1907264" cy="576574"/>
+          </a:xfrm>
+          <a:prstGeom prst="roundRect">
+            <a:avLst/>
+          </a:prstGeom>
+          <a:solidFill>
+            <a:srgbClr val="725EEC"/>
+          </a:solidFill>
+          <a:ln>
+            <a:solidFill>
+              <a:srgbClr val="222222"/>
+            </a:solidFill>
+          </a:ln>
+        </p:spPr>
+        <p:style>
+          <a:lnRef idx="2">
+            <a:schemeClr val="accent1">
+              <a:shade val="15000"/>
+            </a:schemeClr>
+          </a:lnRef>
+          <a:fillRef idx="1">
+            <a:schemeClr val="accent1"/>
+          </a:fillRef>
+          <a:effectRef idx="0">
+            <a:schemeClr val="accent1"/>
+          </a:effectRef>
+          <a:fontRef idx="minor">
+            <a:schemeClr val="lt1"/>
+          </a:fontRef>
+        </p:style>
+        <p:txBody>
+          <a:bodyPr rtlCol="0" anchor="ctr"/>
+          <a:lstStyle/>
+          <a:p>
+            <a:pPr algn="ctr"/>
+            <a:r>
+              <a:rPr lang="en-US" sz="2000" b="1" dirty="0">
+                <a:solidFill>
+                  <a:srgbClr val="222222"/>
+                </a:solidFill>
+              </a:rPr>
+              <a:t>Boxplot / </a:t>
+            </a:r>
+          </a:p>
+          <a:p>
+            <a:pPr algn="ctr"/>
+            <a:r>
+              <a:rPr lang="en-US" sz="2000" b="1" dirty="0">
+                <a:solidFill>
+                  <a:srgbClr val="222222"/>
+                </a:solidFill>
+              </a:rPr>
+              <a:t>Violin Plot</a:t>
+            </a:r>
+          </a:p>
+        </p:txBody>
+      </p:sp>
+    </p:spTree>
+    <p:extLst>
+      <p:ext uri="{BB962C8B-B14F-4D97-AF65-F5344CB8AC3E}">
+        <p14:creationId xmlns:p14="http://schemas.microsoft.com/office/powerpoint/2010/main" val="3797877101"/>
+      </p:ext>
+    </p:extLst>
+  </p:cSld>
+  <p:clrMapOvr>
+    <a:masterClrMapping/>
+  </p:clrMapOvr>
+</p:sld>
+</file>
+
+<file path=ppt/slides/slide8.xml><?xml version="1.0" encoding="utf-8"?>
+<p:sld xmlns:a="http://schemas.openxmlformats.org/drawingml/2006/main" xmlns:r="http://schemas.openxmlformats.org/officeDocument/2006/relationships" xmlns:p="http://schemas.openxmlformats.org/presentationml/2006/main">
+  <p:cSld>
+    <p:spTree>
+      <p:nvGrpSpPr>
+        <p:cNvPr id="1" name="">
+          <a:extLst>
+            <a:ext uri="{FF2B5EF4-FFF2-40B4-BE49-F238E27FC236}">
+              <a16:creationId xmlns:a16="http://schemas.microsoft.com/office/drawing/2014/main" id="{D774934B-FED8-EBED-9F8C-44A848A21FCA}"/>
+            </a:ext>
+          </a:extLst>
+        </p:cNvPr>
+        <p:cNvGrpSpPr/>
+        <p:nvPr/>
+      </p:nvGrpSpPr>
+      <p:grpSpPr>
+        <a:xfrm>
+          <a:off x="0" y="0"/>
+          <a:ext cx="0" cy="0"/>
+          <a:chOff x="0" y="0"/>
+          <a:chExt cx="0" cy="0"/>
+        </a:xfrm>
+      </p:grpSpPr>
+      <p:sp>
+        <p:nvSpPr>
+          <p:cNvPr id="3" name="Title 1">
+            <a:extLst>
+              <a:ext uri="{FF2B5EF4-FFF2-40B4-BE49-F238E27FC236}">
+                <a16:creationId xmlns:a16="http://schemas.microsoft.com/office/drawing/2014/main" id="{AA35BB43-EE50-AA5E-3331-BE5DA6BEDC52}"/>
+              </a:ext>
+            </a:extLst>
+          </p:cNvPr>
+          <p:cNvSpPr txBox="1">
+            <a:spLocks/>
+          </p:cNvSpPr>
+          <p:nvPr/>
+        </p:nvSpPr>
+        <p:spPr>
+          <a:xfrm>
+            <a:off x="0" y="0"/>
+            <a:ext cx="3323063" cy="373232"/>
+          </a:xfrm>
+          <a:prstGeom prst="rect">
+            <a:avLst/>
+          </a:prstGeom>
+          <a:solidFill>
+            <a:srgbClr val="725EEC"/>
+          </a:solidFill>
+        </p:spPr>
+        <p:txBody>
+          <a:bodyPr vert="horz" lIns="91440" tIns="45720" rIns="91440" bIns="45720" rtlCol="0" anchor="ctr">
+            <a:noAutofit/>
+          </a:bodyPr>
+          <a:lstStyle>
+            <a:lvl1pPr algn="ctr" defTabSz="914400" rtl="0" eaLnBrk="1" latinLnBrk="0" hangingPunct="1">
+              <a:lnSpc>
+                <a:spcPct val="90000"/>
+              </a:lnSpc>
+              <a:spcBef>
+                <a:spcPct val="0"/>
+              </a:spcBef>
+              <a:buNone/>
+              <a:defRPr sz="6000" kern="1200">
+                <a:solidFill>
+                  <a:schemeClr val="tx1"/>
+                </a:solidFill>
+                <a:latin typeface="+mj-lt"/>
+                <a:ea typeface="+mj-ea"/>
+                <a:cs typeface="+mj-cs"/>
+              </a:defRPr>
+            </a:lvl1pPr>
+          </a:lstStyle>
+          <a:p>
+            <a:pPr algn="l"/>
+            <a:r>
+              <a:rPr lang="en-US" sz="1800" dirty="0">
+                <a:solidFill>
+                  <a:schemeClr val="bg1"/>
+                </a:solidFill>
+                <a:latin typeface="+mn-lt"/>
+                <a:cs typeface="Arial" panose="020B0604020202020204" pitchFamily="34" charset="0"/>
+              </a:rPr>
+              <a:t>viz-roadmap-05.png</a:t>
+            </a:r>
+          </a:p>
+        </p:txBody>
+      </p:sp>
+      <p:sp>
+        <p:nvSpPr>
+          <p:cNvPr id="14" name="Rounded Rectangle 13">
+            <a:extLst>
+              <a:ext uri="{FF2B5EF4-FFF2-40B4-BE49-F238E27FC236}">
+                <a16:creationId xmlns:a16="http://schemas.microsoft.com/office/drawing/2014/main" id="{4588B4E3-465E-95B6-D49F-53290F867C98}"/>
+              </a:ext>
+            </a:extLst>
+          </p:cNvPr>
+          <p:cNvSpPr/>
+          <p:nvPr/>
+        </p:nvSpPr>
+        <p:spPr>
+          <a:xfrm>
+            <a:off x="3781573" y="1336962"/>
+            <a:ext cx="4441816" cy="467591"/>
+          </a:xfrm>
+          <a:prstGeom prst="roundRect">
+            <a:avLst/>
+          </a:prstGeom>
+          <a:solidFill>
+            <a:srgbClr val="FF6018"/>
+          </a:solidFill>
+          <a:ln>
+            <a:solidFill>
+              <a:srgbClr val="222222"/>
+            </a:solidFill>
+          </a:ln>
+        </p:spPr>
+        <p:style>
+          <a:lnRef idx="2">
+            <a:schemeClr val="accent1">
+              <a:shade val="15000"/>
+            </a:schemeClr>
+          </a:lnRef>
+          <a:fillRef idx="1">
+            <a:schemeClr val="accent1"/>
+          </a:fillRef>
+          <a:effectRef idx="0">
+            <a:schemeClr val="accent1"/>
+          </a:effectRef>
+          <a:fontRef idx="minor">
+            <a:schemeClr val="lt1"/>
+          </a:fontRef>
+        </p:style>
+        <p:txBody>
+          <a:bodyPr rtlCol="0" anchor="ctr"/>
+          <a:lstStyle/>
+          <a:p>
+            <a:pPr algn="ctr"/>
+            <a:r>
+              <a:rPr lang="en-US" b="1" dirty="0">
+                <a:solidFill>
+                  <a:srgbClr val="222222"/>
+                </a:solidFill>
+              </a:rPr>
+              <a:t>Is my </a:t>
+            </a:r>
+            <a:r>
+              <a:rPr lang="en-US" b="1" u="sng" dirty="0">
+                <a:solidFill>
+                  <a:srgbClr val="222222"/>
+                </a:solidFill>
+              </a:rPr>
+              <a:t>explanatory</a:t>
+            </a:r>
+            <a:r>
+              <a:rPr lang="en-US" b="1" dirty="0">
+                <a:solidFill>
+                  <a:srgbClr val="222222"/>
+                </a:solidFill>
+              </a:rPr>
+              <a:t> variable categorical?</a:t>
+            </a:r>
+          </a:p>
+        </p:txBody>
+      </p:sp>
+      <p:sp>
+        <p:nvSpPr>
+          <p:cNvPr id="15" name="Rounded Rectangle 14">
+            <a:extLst>
+              <a:ext uri="{FF2B5EF4-FFF2-40B4-BE49-F238E27FC236}">
+                <a16:creationId xmlns:a16="http://schemas.microsoft.com/office/drawing/2014/main" id="{FAF0D8E8-5D66-156A-1630-737EAC5387AF}"/>
+              </a:ext>
+            </a:extLst>
+          </p:cNvPr>
+          <p:cNvSpPr/>
+          <p:nvPr/>
+        </p:nvSpPr>
+        <p:spPr>
+          <a:xfrm>
+            <a:off x="1589120" y="2744636"/>
+            <a:ext cx="2784765" cy="756437"/>
+          </a:xfrm>
+          <a:prstGeom prst="roundRect">
+            <a:avLst/>
+          </a:prstGeom>
+          <a:solidFill>
+            <a:srgbClr val="FF6018"/>
+          </a:solidFill>
+          <a:ln>
+            <a:solidFill>
+              <a:srgbClr val="222222"/>
+            </a:solidFill>
+          </a:ln>
+        </p:spPr>
+        <p:style>
+          <a:lnRef idx="2">
+            <a:schemeClr val="accent1">
+              <a:shade val="15000"/>
+            </a:schemeClr>
+          </a:lnRef>
+          <a:fillRef idx="1">
+            <a:schemeClr val="accent1"/>
+          </a:fillRef>
+          <a:effectRef idx="0">
+            <a:schemeClr val="accent1"/>
+          </a:effectRef>
+          <a:fontRef idx="minor">
+            <a:schemeClr val="lt1"/>
+          </a:fontRef>
+        </p:style>
+        <p:txBody>
+          <a:bodyPr rtlCol="0" anchor="ctr"/>
+          <a:lstStyle/>
+          <a:p>
+            <a:pPr algn="ctr"/>
+            <a:r>
+              <a:rPr lang="en-US" b="1" dirty="0">
+                <a:solidFill>
+                  <a:srgbClr val="222222"/>
+                </a:solidFill>
+              </a:rPr>
+              <a:t>Is the </a:t>
+            </a:r>
+            <a:r>
+              <a:rPr lang="en-US" b="1" u="sng" dirty="0">
+                <a:solidFill>
+                  <a:srgbClr val="222222"/>
+                </a:solidFill>
+              </a:rPr>
+              <a:t>range</a:t>
+            </a:r>
+            <a:r>
+              <a:rPr lang="en-US" b="1" dirty="0">
+                <a:solidFill>
+                  <a:srgbClr val="222222"/>
+                </a:solidFill>
+              </a:rPr>
+              <a:t> of the data what’s important?</a:t>
+            </a:r>
+          </a:p>
+        </p:txBody>
+      </p:sp>
+      <p:sp>
+        <p:nvSpPr>
+          <p:cNvPr id="16" name="Rounded Rectangle 15">
+            <a:extLst>
+              <a:ext uri="{FF2B5EF4-FFF2-40B4-BE49-F238E27FC236}">
+                <a16:creationId xmlns:a16="http://schemas.microsoft.com/office/drawing/2014/main" id="{D5586C52-495A-A1DA-EC2F-F20F8DFFEEB5}"/>
+              </a:ext>
+            </a:extLst>
+          </p:cNvPr>
+          <p:cNvSpPr/>
+          <p:nvPr/>
+        </p:nvSpPr>
+        <p:spPr>
+          <a:xfrm>
+            <a:off x="9979238" y="4832166"/>
+            <a:ext cx="1907264" cy="576574"/>
+          </a:xfrm>
+          <a:prstGeom prst="roundRect">
+            <a:avLst/>
+          </a:prstGeom>
+          <a:solidFill>
+            <a:srgbClr val="725EEC"/>
+          </a:solidFill>
+          <a:ln>
+            <a:solidFill>
+              <a:srgbClr val="222222"/>
+            </a:solidFill>
+          </a:ln>
+        </p:spPr>
+        <p:style>
+          <a:lnRef idx="2">
+            <a:schemeClr val="accent1">
+              <a:shade val="15000"/>
+            </a:schemeClr>
+          </a:lnRef>
+          <a:fillRef idx="1">
+            <a:schemeClr val="accent1"/>
+          </a:fillRef>
+          <a:effectRef idx="0">
+            <a:schemeClr val="accent1"/>
+          </a:effectRef>
+          <a:fontRef idx="minor">
+            <a:schemeClr val="lt1"/>
+          </a:fontRef>
+        </p:style>
+        <p:txBody>
+          <a:bodyPr rtlCol="0" anchor="ctr"/>
+          <a:lstStyle/>
+          <a:p>
+            <a:pPr algn="ctr"/>
+            <a:r>
+              <a:rPr lang="en-US" sz="2800" b="1" dirty="0">
+                <a:solidFill>
+                  <a:srgbClr val="222222"/>
+                </a:solidFill>
+              </a:rPr>
+              <a:t>Scatterplot</a:t>
+            </a:r>
+          </a:p>
+        </p:txBody>
+      </p:sp>
+      <p:sp>
+        <p:nvSpPr>
+          <p:cNvPr id="17" name="Rounded Rectangle 16">
+            <a:extLst>
+              <a:ext uri="{FF2B5EF4-FFF2-40B4-BE49-F238E27FC236}">
+                <a16:creationId xmlns:a16="http://schemas.microsoft.com/office/drawing/2014/main" id="{9879AD0E-5CFB-C22C-7C51-8165665A9C0B}"/>
+              </a:ext>
+            </a:extLst>
+          </p:cNvPr>
+          <p:cNvSpPr/>
+          <p:nvPr/>
+        </p:nvSpPr>
+        <p:spPr>
+          <a:xfrm>
+            <a:off x="7194473" y="4832166"/>
+            <a:ext cx="1907264" cy="576574"/>
+          </a:xfrm>
+          <a:prstGeom prst="roundRect">
+            <a:avLst/>
+          </a:prstGeom>
+          <a:solidFill>
+            <a:srgbClr val="725EEC"/>
+          </a:solidFill>
+          <a:ln>
+            <a:solidFill>
+              <a:srgbClr val="222222"/>
+            </a:solidFill>
+          </a:ln>
+        </p:spPr>
+        <p:style>
+          <a:lnRef idx="2">
+            <a:schemeClr val="accent1">
+              <a:shade val="15000"/>
+            </a:schemeClr>
+          </a:lnRef>
+          <a:fillRef idx="1">
+            <a:schemeClr val="accent1"/>
+          </a:fillRef>
+          <a:effectRef idx="0">
+            <a:schemeClr val="accent1"/>
+          </a:effectRef>
+          <a:fontRef idx="minor">
+            <a:schemeClr val="lt1"/>
+          </a:fontRef>
+        </p:style>
+        <p:txBody>
+          <a:bodyPr rtlCol="0" anchor="ctr"/>
+          <a:lstStyle/>
+          <a:p>
+            <a:pPr algn="ctr"/>
+            <a:r>
+              <a:rPr lang="en-US" sz="2000" b="1" dirty="0">
+                <a:solidFill>
+                  <a:srgbClr val="222222"/>
+                </a:solidFill>
+              </a:rPr>
+              <a:t>Scatterplot + ”Best Fit” Line</a:t>
+            </a:r>
+          </a:p>
+        </p:txBody>
+      </p:sp>
+      <p:cxnSp>
+        <p:nvCxnSpPr>
+          <p:cNvPr id="20" name="Curved Connector 19">
+            <a:extLst>
+              <a:ext uri="{FF2B5EF4-FFF2-40B4-BE49-F238E27FC236}">
+                <a16:creationId xmlns:a16="http://schemas.microsoft.com/office/drawing/2014/main" id="{1C870C5F-30F1-75A4-4E17-6DAE6BB75B52}"/>
+              </a:ext>
+            </a:extLst>
+          </p:cNvPr>
+          <p:cNvCxnSpPr>
+            <a:cxnSpLocks/>
+            <a:stCxn id="14" idx="2"/>
+            <a:endCxn id="24" idx="0"/>
+          </p:cNvCxnSpPr>
+          <p:nvPr/>
+        </p:nvCxnSpPr>
+        <p:spPr>
+          <a:xfrm rot="16200000" flipH="1">
+            <a:off x="7236983" y="570050"/>
+            <a:ext cx="1069003" cy="3538007"/>
+          </a:xfrm>
+          <a:prstGeom prst="curvedConnector3">
+            <a:avLst>
+              <a:gd name="adj1" fmla="val 50000"/>
+            </a:avLst>
+          </a:prstGeom>
+          <a:ln w="38100">
+            <a:solidFill>
+              <a:srgbClr val="FFB02F"/>
+            </a:solidFill>
+            <a:tailEnd type="triangle"/>
+          </a:ln>
+        </p:spPr>
+        <p:style>
+          <a:lnRef idx="1">
+            <a:schemeClr val="accent1"/>
+          </a:lnRef>
+          <a:fillRef idx="0">
+            <a:schemeClr val="accent1"/>
+          </a:fillRef>
+          <a:effectRef idx="0">
+            <a:schemeClr val="accent1"/>
+          </a:effectRef>
+          <a:fontRef idx="minor">
+            <a:schemeClr val="tx1"/>
+          </a:fontRef>
+        </p:style>
+      </p:cxnSp>
+      <p:cxnSp>
+        <p:nvCxnSpPr>
+          <p:cNvPr id="23" name="Curved Connector 22">
+            <a:extLst>
+              <a:ext uri="{FF2B5EF4-FFF2-40B4-BE49-F238E27FC236}">
+                <a16:creationId xmlns:a16="http://schemas.microsoft.com/office/drawing/2014/main" id="{D17583F4-4FCC-E56B-C659-15C63D113A68}"/>
+              </a:ext>
+            </a:extLst>
+          </p:cNvPr>
+          <p:cNvCxnSpPr>
+            <a:cxnSpLocks/>
+            <a:stCxn id="14" idx="2"/>
+            <a:endCxn id="15" idx="0"/>
+          </p:cNvCxnSpPr>
+          <p:nvPr/>
+        </p:nvCxnSpPr>
+        <p:spPr>
+          <a:xfrm rot="5400000">
+            <a:off x="4021951" y="764105"/>
+            <a:ext cx="940083" cy="3020978"/>
+          </a:xfrm>
+          <a:prstGeom prst="curvedConnector3">
+            <a:avLst/>
+          </a:prstGeom>
+          <a:ln w="38100">
+            <a:solidFill>
+              <a:srgbClr val="DF227C"/>
+            </a:solidFill>
+            <a:tailEnd type="triangle"/>
+          </a:ln>
+        </p:spPr>
+        <p:style>
+          <a:lnRef idx="1">
+            <a:schemeClr val="accent1"/>
+          </a:lnRef>
+          <a:fillRef idx="0">
+            <a:schemeClr val="accent1"/>
+          </a:fillRef>
+          <a:effectRef idx="0">
+            <a:schemeClr val="accent1"/>
+          </a:effectRef>
+          <a:fontRef idx="minor">
+            <a:schemeClr val="tx1"/>
+          </a:fontRef>
+        </p:style>
+      </p:cxnSp>
+      <p:sp>
+        <p:nvSpPr>
+          <p:cNvPr id="24" name="Rounded Rectangle 23">
+            <a:extLst>
+              <a:ext uri="{FF2B5EF4-FFF2-40B4-BE49-F238E27FC236}">
+                <a16:creationId xmlns:a16="http://schemas.microsoft.com/office/drawing/2014/main" id="{E6DA6F40-5932-921B-C5F2-15B94149766C}"/>
+              </a:ext>
+            </a:extLst>
+          </p:cNvPr>
+          <p:cNvSpPr/>
+          <p:nvPr/>
+        </p:nvSpPr>
+        <p:spPr>
+          <a:xfrm>
+            <a:off x="8148105" y="2873556"/>
+            <a:ext cx="2784765" cy="498596"/>
+          </a:xfrm>
+          <a:prstGeom prst="roundRect">
+            <a:avLst/>
+          </a:prstGeom>
+          <a:solidFill>
+            <a:srgbClr val="FF6018"/>
+          </a:solidFill>
+          <a:ln>
+            <a:solidFill>
+              <a:srgbClr val="222222"/>
+            </a:solidFill>
+          </a:ln>
+        </p:spPr>
+        <p:style>
+          <a:lnRef idx="2">
+            <a:schemeClr val="accent1">
+              <a:shade val="15000"/>
+            </a:schemeClr>
+          </a:lnRef>
+          <a:fillRef idx="1">
+            <a:schemeClr val="accent1"/>
+          </a:fillRef>
+          <a:effectRef idx="0">
+            <a:schemeClr val="accent1"/>
+          </a:effectRef>
+          <a:fontRef idx="minor">
+            <a:schemeClr val="lt1"/>
+          </a:fontRef>
+        </p:style>
+        <p:txBody>
+          <a:bodyPr rtlCol="0" anchor="ctr"/>
+          <a:lstStyle/>
+          <a:p>
+            <a:pPr algn="ctr"/>
+            <a:r>
+              <a:rPr lang="en-US" b="1" dirty="0">
+                <a:solidFill>
+                  <a:srgbClr val="222222"/>
+                </a:solidFill>
+              </a:rPr>
+              <a:t>Do I care about the </a:t>
+            </a:r>
+            <a:r>
+              <a:rPr lang="en-US" b="1" u="sng" dirty="0">
+                <a:solidFill>
+                  <a:srgbClr val="222222"/>
+                </a:solidFill>
+              </a:rPr>
+              <a:t>trend</a:t>
+            </a:r>
+            <a:r>
+              <a:rPr lang="en-US" b="1" dirty="0">
+                <a:solidFill>
+                  <a:srgbClr val="222222"/>
+                </a:solidFill>
+              </a:rPr>
+              <a:t>?</a:t>
+            </a:r>
+          </a:p>
+        </p:txBody>
+      </p:sp>
+      <p:cxnSp>
+        <p:nvCxnSpPr>
+          <p:cNvPr id="25" name="Curved Connector 24">
+            <a:extLst>
+              <a:ext uri="{FF2B5EF4-FFF2-40B4-BE49-F238E27FC236}">
+                <a16:creationId xmlns:a16="http://schemas.microsoft.com/office/drawing/2014/main" id="{ED830C8A-6F9C-4CEF-1527-7D4F266F1D53}"/>
+              </a:ext>
+            </a:extLst>
+          </p:cNvPr>
+          <p:cNvCxnSpPr>
+            <a:cxnSpLocks/>
+            <a:stCxn id="24" idx="2"/>
+            <a:endCxn id="16" idx="0"/>
+          </p:cNvCxnSpPr>
+          <p:nvPr/>
+        </p:nvCxnSpPr>
+        <p:spPr>
+          <a:xfrm rot="16200000" flipH="1">
+            <a:off x="9506672" y="3405968"/>
+            <a:ext cx="1460014" cy="1392382"/>
+          </a:xfrm>
+          <a:prstGeom prst="curvedConnector3">
+            <a:avLst>
+              <a:gd name="adj1" fmla="val 50000"/>
+            </a:avLst>
+          </a:prstGeom>
+          <a:ln w="38100">
+            <a:solidFill>
+              <a:srgbClr val="FFB02F"/>
+            </a:solidFill>
+            <a:tailEnd type="triangle"/>
+          </a:ln>
+        </p:spPr>
+        <p:style>
+          <a:lnRef idx="1">
+            <a:schemeClr val="accent1"/>
+          </a:lnRef>
+          <a:fillRef idx="0">
+            <a:schemeClr val="accent1"/>
+          </a:fillRef>
+          <a:effectRef idx="0">
+            <a:schemeClr val="accent1"/>
+          </a:effectRef>
+          <a:fontRef idx="minor">
+            <a:schemeClr val="tx1"/>
+          </a:fontRef>
+        </p:style>
+      </p:cxnSp>
+      <p:cxnSp>
+        <p:nvCxnSpPr>
+          <p:cNvPr id="29" name="Curved Connector 28">
+            <a:extLst>
+              <a:ext uri="{FF2B5EF4-FFF2-40B4-BE49-F238E27FC236}">
+                <a16:creationId xmlns:a16="http://schemas.microsoft.com/office/drawing/2014/main" id="{8EA8BACC-0D94-C47C-A093-1AB9C67A7982}"/>
+              </a:ext>
+            </a:extLst>
+          </p:cNvPr>
+          <p:cNvCxnSpPr>
+            <a:cxnSpLocks/>
+            <a:stCxn id="24" idx="2"/>
+            <a:endCxn id="17" idx="0"/>
+          </p:cNvCxnSpPr>
+          <p:nvPr/>
+        </p:nvCxnSpPr>
+        <p:spPr>
+          <a:xfrm rot="5400000">
+            <a:off x="8114290" y="3405968"/>
+            <a:ext cx="1460014" cy="1392383"/>
+          </a:xfrm>
+          <a:prstGeom prst="curvedConnector3">
+            <a:avLst>
+              <a:gd name="adj1" fmla="val 50000"/>
+            </a:avLst>
+          </a:prstGeom>
+          <a:ln w="38100">
+            <a:solidFill>
+              <a:srgbClr val="DF227C"/>
+            </a:solidFill>
+            <a:tailEnd type="triangle"/>
+          </a:ln>
+        </p:spPr>
+        <p:style>
+          <a:lnRef idx="1">
+            <a:schemeClr val="accent1"/>
+          </a:lnRef>
+          <a:fillRef idx="0">
+            <a:schemeClr val="accent1"/>
+          </a:fillRef>
+          <a:effectRef idx="0">
+            <a:schemeClr val="accent1"/>
+          </a:effectRef>
+          <a:fontRef idx="minor">
+            <a:schemeClr val="tx1"/>
+          </a:fontRef>
+        </p:style>
+      </p:cxnSp>
+      <p:sp>
+        <p:nvSpPr>
+          <p:cNvPr id="40" name="TextBox 39">
+            <a:extLst>
+              <a:ext uri="{FF2B5EF4-FFF2-40B4-BE49-F238E27FC236}">
+                <a16:creationId xmlns:a16="http://schemas.microsoft.com/office/drawing/2014/main" id="{53760694-8F3D-D9E7-161F-515E4D8F2467}"/>
+              </a:ext>
+            </a:extLst>
+          </p:cNvPr>
+          <p:cNvSpPr txBox="1"/>
+          <p:nvPr/>
+        </p:nvSpPr>
+        <p:spPr>
+          <a:xfrm>
+            <a:off x="7459681" y="1980880"/>
+            <a:ext cx="460382" cy="369332"/>
+          </a:xfrm>
+          <a:prstGeom prst="rect">
+            <a:avLst/>
+          </a:prstGeom>
+          <a:noFill/>
+        </p:spPr>
+        <p:txBody>
+          <a:bodyPr wrap="none" rtlCol="0">
+            <a:spAutoFit/>
+          </a:bodyPr>
+          <a:lstStyle/>
+          <a:p>
+            <a:r>
+              <a:rPr lang="en-US" b="1" dirty="0">
+                <a:solidFill>
+                  <a:srgbClr val="FFB02F"/>
+                </a:solidFill>
+              </a:rPr>
+              <a:t>No</a:t>
+            </a:r>
+          </a:p>
+        </p:txBody>
+      </p:sp>
+      <p:sp>
+        <p:nvSpPr>
+          <p:cNvPr id="41" name="TextBox 40">
+            <a:extLst>
+              <a:ext uri="{FF2B5EF4-FFF2-40B4-BE49-F238E27FC236}">
+                <a16:creationId xmlns:a16="http://schemas.microsoft.com/office/drawing/2014/main" id="{1DD2731C-1934-B197-B2D2-11625DDBBCA2}"/>
+              </a:ext>
+            </a:extLst>
+          </p:cNvPr>
+          <p:cNvSpPr txBox="1"/>
+          <p:nvPr/>
+        </p:nvSpPr>
+        <p:spPr>
+          <a:xfrm>
+            <a:off x="10236679" y="3686082"/>
+            <a:ext cx="460382" cy="369332"/>
+          </a:xfrm>
+          <a:prstGeom prst="rect">
+            <a:avLst/>
+          </a:prstGeom>
+          <a:noFill/>
+        </p:spPr>
+        <p:txBody>
+          <a:bodyPr wrap="none" rtlCol="0">
+            <a:spAutoFit/>
+          </a:bodyPr>
+          <a:lstStyle/>
+          <a:p>
+            <a:r>
+              <a:rPr lang="en-US" b="1" dirty="0">
+                <a:solidFill>
+                  <a:srgbClr val="FFB02F"/>
+                </a:solidFill>
+              </a:rPr>
+              <a:t>No</a:t>
+            </a:r>
+          </a:p>
+        </p:txBody>
+      </p:sp>
+      <p:sp>
+        <p:nvSpPr>
+          <p:cNvPr id="42" name="TextBox 41">
+            <a:extLst>
+              <a:ext uri="{FF2B5EF4-FFF2-40B4-BE49-F238E27FC236}">
+                <a16:creationId xmlns:a16="http://schemas.microsoft.com/office/drawing/2014/main" id="{B7566249-CCDE-3A43-A7AC-F01E301F8118}"/>
+              </a:ext>
+            </a:extLst>
+          </p:cNvPr>
+          <p:cNvSpPr txBox="1"/>
+          <p:nvPr/>
+        </p:nvSpPr>
+        <p:spPr>
+          <a:xfrm>
+            <a:off x="8452575" y="3686082"/>
+            <a:ext cx="493212" cy="369332"/>
+          </a:xfrm>
+          <a:prstGeom prst="rect">
+            <a:avLst/>
+          </a:prstGeom>
+          <a:noFill/>
+        </p:spPr>
+        <p:txBody>
+          <a:bodyPr wrap="none" rtlCol="0">
+            <a:spAutoFit/>
+          </a:bodyPr>
+          <a:lstStyle/>
+          <a:p>
+            <a:r>
+              <a:rPr lang="en-US" b="1" dirty="0">
+                <a:solidFill>
+                  <a:srgbClr val="DF227C"/>
+                </a:solidFill>
+              </a:rPr>
+              <a:t>Yes</a:t>
+            </a:r>
+          </a:p>
+        </p:txBody>
+      </p:sp>
+      <p:sp>
+        <p:nvSpPr>
+          <p:cNvPr id="47" name="TextBox 46">
+            <a:extLst>
+              <a:ext uri="{FF2B5EF4-FFF2-40B4-BE49-F238E27FC236}">
+                <a16:creationId xmlns:a16="http://schemas.microsoft.com/office/drawing/2014/main" id="{FEDC6271-0E15-4B26-B7E9-C15D812ABFC7}"/>
+              </a:ext>
+            </a:extLst>
+          </p:cNvPr>
+          <p:cNvSpPr txBox="1"/>
+          <p:nvPr/>
+        </p:nvSpPr>
+        <p:spPr>
+          <a:xfrm>
+            <a:off x="4298675" y="1935529"/>
+            <a:ext cx="493212" cy="369332"/>
+          </a:xfrm>
+          <a:prstGeom prst="rect">
+            <a:avLst/>
+          </a:prstGeom>
+          <a:noFill/>
+        </p:spPr>
+        <p:txBody>
+          <a:bodyPr wrap="none" rtlCol="0">
+            <a:spAutoFit/>
+          </a:bodyPr>
+          <a:lstStyle/>
+          <a:p>
+            <a:r>
+              <a:rPr lang="en-US" b="1" dirty="0">
+                <a:solidFill>
+                  <a:srgbClr val="DF227C"/>
+                </a:solidFill>
+              </a:rPr>
+              <a:t>Yes</a:t>
+            </a:r>
+          </a:p>
+        </p:txBody>
+      </p:sp>
+      <p:cxnSp>
+        <p:nvCxnSpPr>
+          <p:cNvPr id="61" name="Curved Connector 60">
+            <a:extLst>
+              <a:ext uri="{FF2B5EF4-FFF2-40B4-BE49-F238E27FC236}">
+                <a16:creationId xmlns:a16="http://schemas.microsoft.com/office/drawing/2014/main" id="{1B63C3E8-AC42-A345-6BC4-6F43B9CEBD53}"/>
+              </a:ext>
+            </a:extLst>
+          </p:cNvPr>
+          <p:cNvCxnSpPr>
+            <a:cxnSpLocks/>
+            <a:stCxn id="15" idx="2"/>
+            <a:endCxn id="67" idx="0"/>
+          </p:cNvCxnSpPr>
+          <p:nvPr/>
+        </p:nvCxnSpPr>
+        <p:spPr>
+          <a:xfrm rot="16200000" flipH="1">
+            <a:off x="3012148" y="3470428"/>
+            <a:ext cx="1331093" cy="1392382"/>
+          </a:xfrm>
+          <a:prstGeom prst="curvedConnector3">
+            <a:avLst>
+              <a:gd name="adj1" fmla="val 50000"/>
+            </a:avLst>
+          </a:prstGeom>
+          <a:ln w="38100">
+            <a:solidFill>
+              <a:srgbClr val="FFB02F"/>
+            </a:solidFill>
+            <a:tailEnd type="triangle"/>
+          </a:ln>
+        </p:spPr>
+        <p:style>
+          <a:lnRef idx="1">
+            <a:schemeClr val="accent1"/>
+          </a:lnRef>
+          <a:fillRef idx="0">
+            <a:schemeClr val="accent1"/>
+          </a:fillRef>
+          <a:effectRef idx="0">
+            <a:schemeClr val="accent1"/>
+          </a:effectRef>
+          <a:fontRef idx="minor">
+            <a:schemeClr val="tx1"/>
+          </a:fontRef>
+        </p:style>
+      </p:cxnSp>
+      <p:cxnSp>
+        <p:nvCxnSpPr>
+          <p:cNvPr id="62" name="Curved Connector 61">
+            <a:extLst>
+              <a:ext uri="{FF2B5EF4-FFF2-40B4-BE49-F238E27FC236}">
+                <a16:creationId xmlns:a16="http://schemas.microsoft.com/office/drawing/2014/main" id="{B9934A2F-7B73-5F39-DD0C-781D65BB8962}"/>
+              </a:ext>
+            </a:extLst>
+          </p:cNvPr>
+          <p:cNvCxnSpPr>
+            <a:cxnSpLocks/>
+            <a:stCxn id="15" idx="2"/>
+            <a:endCxn id="68" idx="0"/>
+          </p:cNvCxnSpPr>
+          <p:nvPr/>
+        </p:nvCxnSpPr>
+        <p:spPr>
+          <a:xfrm rot="5400000">
+            <a:off x="1619766" y="3470428"/>
+            <a:ext cx="1331093" cy="1392383"/>
+          </a:xfrm>
+          <a:prstGeom prst="curvedConnector3">
+            <a:avLst>
+              <a:gd name="adj1" fmla="val 50000"/>
+            </a:avLst>
+          </a:prstGeom>
+          <a:ln w="38100">
+            <a:solidFill>
+              <a:srgbClr val="DF227C"/>
+            </a:solidFill>
+            <a:tailEnd type="triangle"/>
+          </a:ln>
+        </p:spPr>
+        <p:style>
+          <a:lnRef idx="1">
+            <a:schemeClr val="accent1"/>
+          </a:lnRef>
+          <a:fillRef idx="0">
+            <a:schemeClr val="accent1"/>
+          </a:fillRef>
+          <a:effectRef idx="0">
+            <a:schemeClr val="accent1"/>
+          </a:effectRef>
+          <a:fontRef idx="minor">
+            <a:schemeClr val="tx1"/>
+          </a:fontRef>
+        </p:style>
+      </p:cxnSp>
+      <p:sp>
+        <p:nvSpPr>
+          <p:cNvPr id="63" name="TextBox 62">
+            <a:extLst>
+              <a:ext uri="{FF2B5EF4-FFF2-40B4-BE49-F238E27FC236}">
+                <a16:creationId xmlns:a16="http://schemas.microsoft.com/office/drawing/2014/main" id="{317A9210-31D6-A941-1AE7-A44E0BF11E78}"/>
+              </a:ext>
+            </a:extLst>
+          </p:cNvPr>
+          <p:cNvSpPr txBox="1"/>
+          <p:nvPr/>
+        </p:nvSpPr>
+        <p:spPr>
+          <a:xfrm>
+            <a:off x="3606044" y="3797287"/>
+            <a:ext cx="460382" cy="369332"/>
+          </a:xfrm>
+          <a:prstGeom prst="rect">
+            <a:avLst/>
+          </a:prstGeom>
+          <a:noFill/>
+        </p:spPr>
+        <p:txBody>
+          <a:bodyPr wrap="none" rtlCol="0">
+            <a:spAutoFit/>
+          </a:bodyPr>
+          <a:lstStyle/>
+          <a:p>
+            <a:r>
+              <a:rPr lang="en-US" b="1" dirty="0">
+                <a:solidFill>
+                  <a:srgbClr val="FFB02F"/>
+                </a:solidFill>
+              </a:rPr>
+              <a:t>No</a:t>
+            </a:r>
+          </a:p>
+        </p:txBody>
+      </p:sp>
+      <p:sp>
+        <p:nvSpPr>
+          <p:cNvPr id="64" name="TextBox 63">
+            <a:extLst>
+              <a:ext uri="{FF2B5EF4-FFF2-40B4-BE49-F238E27FC236}">
+                <a16:creationId xmlns:a16="http://schemas.microsoft.com/office/drawing/2014/main" id="{DE79DAB0-BF99-E596-2804-CF93DE883D74}"/>
+              </a:ext>
+            </a:extLst>
+          </p:cNvPr>
+          <p:cNvSpPr txBox="1"/>
+          <p:nvPr/>
+        </p:nvSpPr>
+        <p:spPr>
+          <a:xfrm>
+            <a:off x="1932730" y="3797287"/>
+            <a:ext cx="493212" cy="369332"/>
+          </a:xfrm>
+          <a:prstGeom prst="rect">
+            <a:avLst/>
+          </a:prstGeom>
+          <a:noFill/>
+        </p:spPr>
+        <p:txBody>
+          <a:bodyPr wrap="none" rtlCol="0">
+            <a:spAutoFit/>
+          </a:bodyPr>
+          <a:lstStyle/>
+          <a:p>
+            <a:r>
+              <a:rPr lang="en-US" b="1" dirty="0">
+                <a:solidFill>
+                  <a:srgbClr val="DF227C"/>
+                </a:solidFill>
+              </a:rPr>
+              <a:t>Yes</a:t>
+            </a:r>
+          </a:p>
+        </p:txBody>
+      </p:sp>
+      <p:sp>
+        <p:nvSpPr>
+          <p:cNvPr id="67" name="Rounded Rectangle 66">
+            <a:extLst>
+              <a:ext uri="{FF2B5EF4-FFF2-40B4-BE49-F238E27FC236}">
+                <a16:creationId xmlns:a16="http://schemas.microsoft.com/office/drawing/2014/main" id="{3639FE31-35AB-D0C9-5D87-98BEA40E24AE}"/>
+              </a:ext>
+            </a:extLst>
+          </p:cNvPr>
+          <p:cNvSpPr/>
+          <p:nvPr/>
+        </p:nvSpPr>
+        <p:spPr>
+          <a:xfrm>
+            <a:off x="3420253" y="4832166"/>
+            <a:ext cx="1907264" cy="576574"/>
+          </a:xfrm>
+          <a:prstGeom prst="roundRect">
+            <a:avLst/>
+          </a:prstGeom>
+          <a:solidFill>
+            <a:srgbClr val="725EEC"/>
+          </a:solidFill>
+          <a:ln>
+            <a:solidFill>
+              <a:srgbClr val="222222"/>
+            </a:solidFill>
+          </a:ln>
+        </p:spPr>
+        <p:style>
+          <a:lnRef idx="2">
+            <a:schemeClr val="accent1">
+              <a:shade val="15000"/>
+            </a:schemeClr>
+          </a:lnRef>
+          <a:fillRef idx="1">
+            <a:schemeClr val="accent1"/>
+          </a:fillRef>
+          <a:effectRef idx="0">
+            <a:schemeClr val="accent1"/>
+          </a:effectRef>
+          <a:fontRef idx="minor">
+            <a:schemeClr val="lt1"/>
+          </a:fontRef>
+        </p:style>
+        <p:txBody>
+          <a:bodyPr rtlCol="0" anchor="ctr"/>
+          <a:lstStyle/>
+          <a:p>
+            <a:pPr algn="ctr"/>
+            <a:r>
+              <a:rPr lang="en-US" sz="2800" b="1" dirty="0">
+                <a:solidFill>
+                  <a:srgbClr val="222222"/>
+                </a:solidFill>
+              </a:rPr>
+              <a:t>Bar Graph</a:t>
+            </a:r>
+          </a:p>
+        </p:txBody>
+      </p:sp>
+      <p:sp>
+        <p:nvSpPr>
+          <p:cNvPr id="68" name="Rounded Rectangle 67">
+            <a:extLst>
+              <a:ext uri="{FF2B5EF4-FFF2-40B4-BE49-F238E27FC236}">
+                <a16:creationId xmlns:a16="http://schemas.microsoft.com/office/drawing/2014/main" id="{84252A6E-47FC-DF88-E818-AB5FAEC1F2D3}"/>
+              </a:ext>
+            </a:extLst>
+          </p:cNvPr>
+          <p:cNvSpPr/>
+          <p:nvPr/>
+        </p:nvSpPr>
+        <p:spPr>
+          <a:xfrm>
+            <a:off x="635488" y="4832166"/>
+            <a:ext cx="1907264" cy="576574"/>
+          </a:xfrm>
+          <a:prstGeom prst="roundRect">
+            <a:avLst/>
+          </a:prstGeom>
+          <a:solidFill>
+            <a:srgbClr val="725EEC"/>
+          </a:solidFill>
+          <a:ln>
+            <a:solidFill>
+              <a:srgbClr val="222222"/>
+            </a:solidFill>
+          </a:ln>
+        </p:spPr>
+        <p:style>
+          <a:lnRef idx="2">
+            <a:schemeClr val="accent1">
+              <a:shade val="15000"/>
+            </a:schemeClr>
+          </a:lnRef>
+          <a:fillRef idx="1">
+            <a:schemeClr val="accent1"/>
+          </a:fillRef>
+          <a:effectRef idx="0">
+            <a:schemeClr val="accent1"/>
+          </a:effectRef>
+          <a:fontRef idx="minor">
+            <a:schemeClr val="lt1"/>
+          </a:fontRef>
+        </p:style>
+        <p:txBody>
+          <a:bodyPr rtlCol="0" anchor="ctr"/>
+          <a:lstStyle/>
+          <a:p>
+            <a:pPr algn="ctr"/>
+            <a:r>
+              <a:rPr lang="en-US" sz="2000" b="1" dirty="0">
+                <a:solidFill>
+                  <a:srgbClr val="222222"/>
+                </a:solidFill>
+              </a:rPr>
+              <a:t>Boxplot / </a:t>
+            </a:r>
+          </a:p>
+          <a:p>
+            <a:pPr algn="ctr"/>
+            <a:r>
+              <a:rPr lang="en-US" sz="2000" b="1" dirty="0">
+                <a:solidFill>
+                  <a:srgbClr val="222222"/>
+                </a:solidFill>
+              </a:rPr>
+              <a:t>Violin Plot</a:t>
+            </a:r>
+          </a:p>
+        </p:txBody>
+      </p:sp>
+    </p:spTree>
+    <p:extLst>
+      <p:ext uri="{BB962C8B-B14F-4D97-AF65-F5344CB8AC3E}">
+        <p14:creationId xmlns:p14="http://schemas.microsoft.com/office/powerpoint/2010/main" val="2562658266"/>
       </p:ext>
     </p:extLst>
   </p:cSld>
